--- a/提案資料/WineBank_ワインマイル経済圏構想_黒背景版.pptx
+++ b/提案資料/WineBank_ワインマイル経済圏構想_黒背景版.pptx
@@ -1847,7 +1847,7 @@
           <a:p>
             <a:r>
               <a:rPr lang="en-US" dirty="0"/>
-              <a:t>岩田合同法律事務所（大櫛・関口・國本）2026年9月回答。残る宿題は3点：①マイルを有償で販売する導線は本意見書の対象外であり、対価性が生じるため前払式支払手段に該当する。実装する場合は別途照会が必要 ②賃料を役務提供で充当する場合の契約書文言 ③マイル無償付与の課税整理（税理士）。</a:t>
+              <a:t>岩田合同法律事務所（大櫛・関口・國本）2026年9月20日クリーンオピニオン。／通常マイルの有効期限は1年とするため、資金決済法4条2号の適用外。無償付与という第1の安全弁のみに依存する。仮に該当と評価された場合、基準日の未使用残高が1,000万円を超えると届出・供託が生じるが、その水準に達するのは預かり資産およそ3.9億円から。／有償でのマイル販売は本意見書の照会対象外。ただし有効期限を6ヶ月以内にすれば4条2号により各種義務は生じないため、実装する場合はその設計を前提に別途照会する。／残る宿題は成果報酬契約の文言と、無償付与マイルの課税整理（税理士）。</a:t>
             </a:r>
             <a:endParaRPr lang="en-US" dirty="0"/>
           </a:p>
@@ -2727,7 +2727,7 @@
           <a:p>
             <a:r>
               <a:rPr lang="en-US" dirty="0"/>
-              <a:t>純粋サブリース（値上がり全取り）は買戻し義務を伴い収益認識で詰む。2契約に分けることで、法務・会計・マーケの3つが同時に立つ。／2026年9月の弁護士意見書により、マイルを賃貸借の対価（賃料）として発行すると資金決済法の前払式支払手段に該当し得るため、賃料は役務提供で充当し、マイルは管理手数料に対する無償付与として整理する。</a:t>
+              <a:t>2026年9月20日の岩田合同法律事務所の回答により、マイルは管理料に対するおまけ（無償発行）として整理し、前払式支払手段の対価性要件を満たさないことを確認済み。当初検討していたマスターリース（動産賃貸借）は締結しない。賃料としてマイルを発行すると対価性が生じるため、賃貸借を置かないこと自体が最も安全な設計になる。売買契約は利用規約への同意により成立し、管理手数料の対価も規約に記載する。</a:t>
             </a:r>
             <a:endParaRPr lang="en-US" dirty="0"/>
           </a:p>
@@ -16275,7 +16275,7 @@
                 <a:ea typeface="Meiryo" pitchFamily="34" charset="-122"/>
                 <a:cs typeface="Meiryo" pitchFamily="34" charset="-120"/>
               </a:rPr>
-              <a:t>飲むつもりの人に賃貸借は不要です。そして運用型の人も、途中で飲みたくなります。</a:t>
+              <a:t>飲むつもりの人に成果報酬は不要です。そして運用型の人も、途中で飲みたくなります。</a:t>
             </a:r>
             <a:endParaRPr lang="en-US" sz="1300" dirty="0"/>
           </a:p>
@@ -16426,7 +16426,7 @@
                 <a:ea typeface="Meiryo" pitchFamily="34" charset="-122"/>
                 <a:cs typeface="Meiryo" pitchFamily="34" charset="-120"/>
               </a:rPr>
-              <a:t>賃貸借 ＋ 成功報酬25%</a:t>
+              <a:t>売買・管理 ＋ 成果報酬</a:t>
             </a:r>
             <a:endParaRPr lang="en-US" sz="1200" dirty="0"/>
           </a:p>
@@ -16472,7 +16472,7 @@
                 <a:ea typeface="Meiryo" pitchFamily="34" charset="-122"/>
                 <a:cs typeface="Meiryo" pitchFamily="34" charset="-120"/>
               </a:rPr>
-              <a:t>ワインは当社が賃借（賃料は役務で充当）</a:t>
+              <a:t>所有権は会員のまま。当社が保管・保険・管理</a:t>
             </a:r>
             <a:endParaRPr lang="en-US" sz="1150" dirty="0"/>
           </a:p>
@@ -16496,7 +16496,7 @@
                 <a:ea typeface="Meiryo" pitchFamily="34" charset="-122"/>
                 <a:cs typeface="Meiryo" pitchFamily="34" charset="-120"/>
               </a:rPr>
-              <a:t>マイルは管理手数料に対する無償付与</a:t>
+              <a:t>マイルは管理料に対するおまけ（無償）</a:t>
             </a:r>
             <a:endParaRPr lang="en-US" sz="1150" dirty="0"/>
           </a:p>
@@ -16520,7 +16520,7 @@
                 <a:ea typeface="Meiryo" pitchFamily="34" charset="-122"/>
                 <a:cs typeface="Meiryo" pitchFamily="34" charset="-120"/>
               </a:rPr>
-              <a:t>値上がりの75%は会員のもの。出口は自由</a:t>
+              <a:t>値上がりの70〜75%は会員のもの。出口は自由</a:t>
             </a:r>
             <a:endParaRPr lang="en-US" sz="1150" dirty="0"/>
           </a:p>
@@ -16678,7 +16678,7 @@
                 <a:ea typeface="Meiryo" pitchFamily="34" charset="-122"/>
                 <a:cs typeface="Meiryo" pitchFamily="34" charset="-120"/>
               </a:rPr>
-              <a:t>賃貸借も成功報酬もかからない</a:t>
+              <a:t>成果報酬はかからない</a:t>
             </a:r>
             <a:endParaRPr lang="en-US" sz="1150" dirty="0"/>
           </a:p>
@@ -29657,7 +29657,7 @@
                 <a:ea typeface="Meiryo" pitchFamily="34" charset="-122"/>
                 <a:cs typeface="Meiryo" pitchFamily="34" charset="-120"/>
               </a:rPr>
-              <a:t>賃貸借契約の終了時（売却・引取・転換のいずれでも）</a:t>
+              <a:t>管理契約の終了時（売却・引取・転換のいずれでも）</a:t>
             </a:r>
             <a:endParaRPr lang="en-US" sz="1100" dirty="0"/>
           </a:p>
@@ -30571,7 +30571,7 @@
                 <a:ea typeface="Meiryo" pitchFamily="34" charset="-122"/>
                 <a:cs typeface="Meiryo" pitchFamily="34" charset="-120"/>
               </a:rPr>
-              <a:t>岩田合同法律事務所より2026年9月に回答を取得。「法律上の問題なく実施できる」との結論です。</a:t>
+              <a:t>岩田合同法律事務所より2026年9月20日にクリーンオピニオンを取得。「対価性の要件を充足する事情は不見当」との結論です。</a:t>
             </a:r>
             <a:endParaRPr lang="en-US" sz="1300" dirty="0"/>
           </a:p>
@@ -30786,7 +30786,7 @@
                 <a:ea typeface="Meiryo" pitchFamily="34" charset="-122"/>
                 <a:cs typeface="Meiryo" pitchFamily="34" charset="-120"/>
               </a:rPr>
-              <a:t>無償付与なら該当しない</a:t>
+              <a:t>二重の安全弁がかかっています</a:t>
             </a:r>
             <a:endParaRPr lang="en-US" sz="1300" dirty="0"/>
           </a:p>
@@ -30828,7 +30828,7 @@
                 <a:ea typeface="Meiryo" pitchFamily="34" charset="-122"/>
                 <a:cs typeface="Meiryo" pitchFamily="34" charset="-120"/>
               </a:rPr>
-              <a:t>無償で発行する限り前払式支払手段には該当せず、届出も供託も不要です。ただしマイルを賃貸借の『賃料』として発行すると対価性が生じ該当し得るため、管理手数料に対するおまけとしての無償付与に整理を統一します。</a:t>
+              <a:t>① 管理料に対するおまけ（無償発行）のため、前払式支払手段の対価性要件を満たしません。② 仮に該当しても、有効期限が発行から6ヶ月以内なら届出・供託・帳簿・報告の義務が生じません（法4条2号）。期間限定マイルは②も満たします。</a:t>
             </a:r>
             <a:endParaRPr lang="en-US" sz="1050" dirty="0"/>
           </a:p>
@@ -31046,7 +31046,7 @@
                 <a:ea typeface="Meiryo" pitchFamily="34" charset="-122"/>
                 <a:cs typeface="Meiryo" pitchFamily="34" charset="-120"/>
               </a:rPr>
-              <a:t>預かるのはワインであり金銭ではないため、『預金』『預り金』の4要件を満たしません。当初懸念していた「年率と言わない」という制約は不要になりました。</a:t>
+              <a:t>預かるのはワインであり金銭ではないため、『預金』『預り金』の4要件を満たしません。賃貸借契約を置かないため、賃料としての対価性が生じる余地もありません。</a:t>
             </a:r>
             <a:endParaRPr lang="en-US" sz="1050" dirty="0"/>
           </a:p>
@@ -33581,7 +33581,7 @@
                 <a:ea typeface="Meiryo" pitchFamily="34" charset="-122"/>
                 <a:cs typeface="Meiryo" pitchFamily="34" charset="-120"/>
               </a:rPr>
-              <a:t>弁護士・税理士の意見書（先行）</a:t>
+              <a:t>弁護士意見書（取得済）</a:t>
             </a:r>
             <a:endParaRPr lang="en-US" sz="1200" dirty="0"/>
           </a:p>
@@ -33605,7 +33605,7 @@
                 <a:ea typeface="Meiryo" pitchFamily="34" charset="-122"/>
                 <a:cs typeface="Meiryo" pitchFamily="34" charset="-120"/>
               </a:rPr>
-              <a:t>賃貸借＋AM契約の整備</a:t>
+              <a:t>売買・管理規約と成果報酬契約の整備</a:t>
             </a:r>
             <a:endParaRPr lang="en-US" sz="1200" dirty="0"/>
           </a:p>
@@ -35801,7 +35801,7 @@
                 <a:ea typeface="Meiryo" pitchFamily="34" charset="-122"/>
                 <a:cs typeface="Meiryo" pitchFamily="34" charset="-120"/>
               </a:rPr>
-              <a:t>①マイル利用規約の整備（経産省ガイドラインの6項目）②賃料を役務で充当する契約書文言 ③無償付与マイルの課税整理（税理士）④古物競りあっせん業者の届出要否</a:t>
+              <a:t>①マイル利用規約の整備（経産省ガイドラインの6項目）②成果報酬契約の文言 ③無償付与マイルの課税整理（税理士）④古物競りあっせん業者の届出要否</a:t>
             </a:r>
             <a:endParaRPr lang="en-US" sz="1050" dirty="0"/>
           </a:p>
@@ -45869,7 +45869,7 @@
                 <a:ea typeface="Meiryo" pitchFamily="34" charset="-122"/>
                 <a:cs typeface="Meiryo" pitchFamily="34" charset="-120"/>
               </a:rPr>
-              <a:t>契約は2本立て：マスターリース ＋ アセットマネジメント</a:t>
+              <a:t>契約は2本立て：売買・管理 ＋ 成功報酬</a:t>
             </a:r>
             <a:endParaRPr lang="en-US" sz="2900" dirty="0"/>
           </a:p>
@@ -45908,7 +45908,7 @@
                 <a:ea typeface="Meiryo" pitchFamily="34" charset="-122"/>
                 <a:cs typeface="Meiryo" pitchFamily="34" charset="-120"/>
               </a:rPr>
-              <a:t>純粋なサブリースなら値上がり分は全額こちらのもの。ただしそれには買戻し義務が必要で、売上が立たなくなります。</a:t>
+              <a:t>賃貸借は使いません。所有権は会員のまま、当社は管理を担い、値上がりの一部を成功報酬で受け取ります。</a:t>
             </a:r>
             <a:endParaRPr lang="en-US" sz="1300" dirty="0"/>
           </a:p>
@@ -46020,7 +46020,7 @@
                 <a:ea typeface="Meiryo" pitchFamily="34" charset="-122"/>
                 <a:cs typeface="Meiryo" pitchFamily="34" charset="-120"/>
               </a:rPr>
-              <a:t>① マスターリース（動産賃貸借）</a:t>
+              <a:t>① 売買 ＋ 管理（利用規約）</a:t>
             </a:r>
             <a:endParaRPr lang="en-US" sz="1500" dirty="0"/>
           </a:p>
@@ -46059,7 +46059,7 @@
                 <a:ea typeface="Meiryo" pitchFamily="34" charset="-122"/>
                 <a:cs typeface="Meiryo" pitchFamily="34" charset="-120"/>
               </a:rPr>
-              <a:t>賃料：保管・保険・管理の役務提供</a:t>
+              <a:t>管理手数料：2.50〜2.75%</a:t>
             </a:r>
             <a:endParaRPr lang="en-US" sz="2000" dirty="0"/>
           </a:p>
@@ -46105,7 +46105,7 @@
                 <a:ea typeface="Meiryo" pitchFamily="34" charset="-122"/>
                 <a:cs typeface="Meiryo" pitchFamily="34" charset="-120"/>
               </a:rPr>
-              <a:t>会員が所有するワインをWineBankが賃借する</a:t>
+              <a:t>利用規約への同意で売買契約が成立する</a:t>
             </a:r>
             <a:endParaRPr lang="en-US" sz="1150" dirty="0"/>
           </a:p>
@@ -46129,7 +46129,7 @@
                 <a:ea typeface="Meiryo" pitchFamily="34" charset="-122"/>
                 <a:cs typeface="Meiryo" pitchFamily="34" charset="-120"/>
               </a:rPr>
-              <a:t>賃料は保管・保険・真正性管理の役務で充当する</a:t>
+              <a:t>デジタルでの資産価値提供・倉庫アレンジ・保険付保の対価</a:t>
             </a:r>
             <a:endParaRPr lang="en-US" sz="1150" dirty="0"/>
           </a:p>
@@ -46153,7 +46153,7 @@
                 <a:ea typeface="Meiryo" pitchFamily="34" charset="-122"/>
                 <a:cs typeface="Meiryo" pitchFamily="34" charset="-120"/>
               </a:rPr>
-              <a:t>マイルは賃料ではない（LEGAL 参照）</a:t>
+              <a:t>マイルはこの管理料に対するおまけ（無償）</a:t>
             </a:r>
             <a:endParaRPr lang="en-US" sz="1150" dirty="0"/>
           </a:p>
@@ -46432,7 +46432,7 @@
                 <a:ea typeface="Meiryo" pitchFamily="34" charset="-122"/>
                 <a:cs typeface="Meiryo" pitchFamily="34" charset="-120"/>
               </a:rPr>
-              <a:t>不動産のファンドと同じ形です。マスターリース会社が借りて運用し、AM会社が運用報酬とディスポジションフィーを取る。</a:t>
+              <a:t>賃貸借契約は締結しません。所有権は会員のまま、当社は保管・保険・真正性管理と、売却時の成功報酬を担います。</a:t>
             </a:r>
             <a:endParaRPr lang="en-US" sz="1350" dirty="0"/>
           </a:p>
@@ -46471,7 +46471,7 @@
                 <a:ea typeface="Meiryo" pitchFamily="34" charset="-122"/>
                 <a:cs typeface="Meiryo" pitchFamily="34" charset="-120"/>
               </a:rPr>
-              <a:t>1本の「サブリース」に押し込むと、値上がり分を取るために買戻し義務が要る＝100万円を売上計上できなくなります。2本に分けることが、法務と会計の両方を通す唯一の形です。</a:t>
+              <a:t>買戻し保証を付けると経済価値が移転せず、100万円を売上計上できません。成功報酬型ならこの論点は生じません。</a:t>
             </a:r>
             <a:endParaRPr lang="en-US" sz="1150" dirty="0"/>
           </a:p>
@@ -46544,7 +46544,7 @@
                 <a:ea typeface="Meiryo" pitchFamily="34" charset="-122"/>
                 <a:cs typeface="Meiryo" pitchFamily="34" charset="-120"/>
               </a:rPr>
-              <a:t>マイルは賃料ではありません。値上がりの75%は会員のもの。当社の取り分は25%だけ。</a:t>
+              <a:t>マイルは管理料に対するおまけです。値上がりの70〜75%は会員のもの。</a:t>
             </a:r>
             <a:endParaRPr lang="en-US" sz="1700" dirty="0"/>
           </a:p>

--- a/提案資料/WineBank_ワインマイル経済圏構想_黒背景版.pptx
+++ b/提案資料/WineBank_ワインマイル経済圏構想_黒背景版.pptx
@@ -791,7 +791,7 @@
           <a:p>
             <a:r>
               <a:rPr lang="en-US" dirty="0"/>
-              <a:t>継続収支：基本ケース+86万/年、良好ケース（オークション誘導強化）+128万/年、最悪ケース▲81万/年。90%保証は系列店への送客投資であり、連結では相殺される。</a:t>
+              <a:t>発行1マイル原価51.1%＝利用時の加重平均56.8%×最終利用率90%。損益分岐45.4%に対し5.7ポイント超過しており、ストック単体の現金は1億あたり年▲27万。90%保証は直営店への送客投資であり、連結では相殺される。誘導先の構成比を動かすことが、この事業で最も効くレバー。</a:t>
             </a:r>
             <a:endParaRPr lang="en-US" dirty="0"/>
           </a:p>
@@ -2287,7 +2287,7 @@
           <a:p>
             <a:r>
               <a:rPr lang="en-US" dirty="0"/>
-              <a:t>すべて単体ベース。連結（マイル原価17.5%）ならPLは+2,451万、継続は+186万/年。保管料1.5%と粗利30%が最大の変数。</a:t>
+              <a:t>すべて単体ベース。マイル原価率51.1%（オークション30%・CLUB10%・スクール80%を織り込み後）。粗利30%とマイル原価率が最大の変数。ストック現金は▲27万/年で、利益はワイン販売粗利と成功報酬に乗っている。</a:t>
             </a:r>
             <a:endParaRPr lang="en-US" dirty="0"/>
           </a:p>
@@ -2375,7 +2375,7 @@
           <a:p>
             <a:r>
               <a:rPr lang="en-US" dirty="0"/>
-              <a:t>従来「継続収支+86万/年」としていたのは保管料1.5%の控除漏れ。正しくは現金ベース▲64万/年、成功報酬の発生を含めて+105万/年。</a:t>
+              <a:t>新レートカード（管理料2.75/2.60/2.50%・還元率4/5/6%・成功報酬30%一律）。ストック単体の現金は▲27万/年で、黒字化には発行1マイル原価を45.4%まで下げる必要がある（現状51.1%）。利益はワイン販売粗利3,000万と成功報酬に乗っている。</a:t>
             </a:r>
             <a:endParaRPr lang="en-US" dirty="0"/>
           </a:p>
@@ -4399,7 +4399,7 @@
                 <a:ea typeface="Meiryo" pitchFamily="34" charset="-122"/>
                 <a:cs typeface="Meiryo" pitchFamily="34" charset="-120"/>
               </a:rPr>
-              <a:t>▲25,000円</a:t>
+              <a:t>▲27,500円</a:t>
             </a:r>
             <a:endParaRPr lang="en-US" sz="2800" dirty="0"/>
           </a:p>
@@ -4441,7 +4441,7 @@
                 <a:ea typeface="Meiryo" pitchFamily="34" charset="-122"/>
                 <a:cs typeface="Meiryo" pitchFamily="34" charset="-120"/>
               </a:rPr>
-              <a:t>年率2.5%。保管料・保険料を含む</a:t>
+              <a:t>年率2.75%。保管料・保険料を含む</a:t>
             </a:r>
             <a:endParaRPr lang="en-US" sz="1100" dirty="0"/>
           </a:p>
@@ -4656,7 +4656,7 @@
                 <a:ea typeface="Meiryo" pitchFamily="34" charset="-122"/>
                 <a:cs typeface="Meiryo" pitchFamily="34" charset="-120"/>
               </a:rPr>
-              <a:t>35,000マイル</a:t>
+              <a:t>40,000マイル</a:t>
             </a:r>
             <a:endParaRPr lang="en-US" sz="2800" dirty="0"/>
           </a:p>
@@ -4698,7 +4698,7 @@
                 <a:ea typeface="Meiryo" pitchFamily="34" charset="-122"/>
                 <a:cs typeface="Meiryo" pitchFamily="34" charset="-120"/>
               </a:rPr>
-              <a:t>年率3.5%（PRESTIGE）。会食・贈答・イベント・オークション・スクールに使える</a:t>
+              <a:t>年率4%（PRESTIGE）。会食・贈答・イベント・オークション・スクールに使える</a:t>
             </a:r>
             <a:endParaRPr lang="en-US" sz="1100" dirty="0"/>
           </a:p>
@@ -4810,7 +4810,7 @@
                 <a:ea typeface="Meiryo" pitchFamily="34" charset="-122"/>
                 <a:cs typeface="Meiryo" pitchFamily="34" charset="-120"/>
               </a:rPr>
-              <a:t>上位ランクは4.5%・5.5%。さらに値上がり分の75%も会員のものとして残ります。</a:t>
+              <a:t>上位ランクは5%・6%。さらに値上がり分の70%も会員のものとして残ります。</a:t>
             </a:r>
             <a:endParaRPr lang="en-US" sz="1250" dirty="0"/>
           </a:p>
@@ -6415,7 +6415,7 @@
                 <a:ea typeface="Meiryo" pitchFamily="34" charset="-122"/>
                 <a:cs typeface="Meiryo" pitchFamily="34" charset="-120"/>
               </a:rPr>
-              <a:t>WineBank単体ベース。系列店へはマイル額面×レート×90%を保証。スクール・イベントは原価率50%。額面100に対する当社コスト。</a:t>
+              <a:t>WineBank単体ベース。直営店へはマイル額面×レート×90%を保証。額面100に対する当社コストで示します。</a:t>
             </a:r>
             <a:endParaRPr lang="en-US" sz="1300" dirty="0"/>
           </a:p>
@@ -6489,7 +6489,7 @@
                 <a:gridCol w="2651760"/>
                 <a:gridCol w="1609344"/>
               </a:tblGrid>
-              <a:tr h="347472">
+              <a:tr h="365760">
                 <a:tc>
                   <a:txBody>
                     <a:bodyPr/>
@@ -6831,7 +6831,7 @@
                   </a:tcPr>
                 </a:tc>
               </a:tr>
-              <a:tr h="292608">
+              <a:tr h="310896">
                 <a:tc>
                   <a:txBody>
                     <a:bodyPr/>
@@ -6849,7 +6849,7 @@
                           <a:ea typeface="Meiryo" pitchFamily="34" charset="-122"/>
                           <a:cs typeface="Meiryo" pitchFamily="34" charset="-120"/>
                         </a:rPr>
-                        <a:t>系列レストラン</a:t>
+                        <a:t>グループ直営飲食</a:t>
                       </a:r>
                       <a:endParaRPr lang="en-US" sz="1100" dirty="0">
                         <a:latin typeface="Meiryo" charset="0"/>
@@ -7173,7 +7173,7 @@
                   </a:tcPr>
                 </a:tc>
               </a:tr>
-              <a:tr h="292608">
+              <a:tr h="310896">
                 <a:tc>
                   <a:txBody>
                     <a:bodyPr/>
@@ -7515,7 +7515,7 @@
                   </a:tcPr>
                 </a:tc>
               </a:tr>
-              <a:tr h="292608">
+              <a:tr h="310896">
                 <a:tc>
                   <a:txBody>
                     <a:bodyPr/>
@@ -7533,7 +7533,7 @@
                           <a:ea typeface="Meiryo" pitchFamily="34" charset="-122"/>
                           <a:cs typeface="Meiryo" pitchFamily="34" charset="-120"/>
                         </a:rPr>
-                        <a:t>WineBank CLUB 充当</a:t>
+                        <a:t>WineBank CLUB 会費充当</a:t>
                       </a:r>
                       <a:endParaRPr lang="en-US" sz="1100" dirty="0">
                         <a:latin typeface="Meiryo" charset="0"/>
@@ -7669,7 +7669,7 @@
                           <a:ea typeface="Meiryo" pitchFamily="34" charset="-122"/>
                           <a:cs typeface="Meiryo" pitchFamily="34" charset="-120"/>
                         </a:rPr>
-                        <a:t>0</a:t>
+                        <a:t>10</a:t>
                       </a:r>
                       <a:endParaRPr lang="en-US" sz="1100" dirty="0">
                         <a:latin typeface="Meiryo" charset="0"/>
@@ -7737,7 +7737,7 @@
                           <a:ea typeface="Meiryo" pitchFamily="34" charset="-122"/>
                           <a:cs typeface="Meiryo" pitchFamily="34" charset="-120"/>
                         </a:rPr>
-                        <a:t>0</a:t>
+                        <a:t>10</a:t>
                       </a:r>
                       <a:endParaRPr lang="en-US" sz="1100" dirty="0">
                         <a:latin typeface="Meiryo" charset="0"/>
@@ -7805,7 +7805,7 @@
                           <a:ea typeface="Meiryo" pitchFamily="34" charset="-122"/>
                           <a:cs typeface="Meiryo" pitchFamily="34" charset="-120"/>
                         </a:rPr>
-                        <a:t>◎</a:t>
+                        <a:t>◎ 最優先</a:t>
                       </a:r>
                       <a:endParaRPr lang="en-US" sz="1100" dirty="0">
                         <a:latin typeface="Meiryo" charset="0"/>
@@ -7857,7 +7857,7 @@
                   </a:tcPr>
                 </a:tc>
               </a:tr>
-              <a:tr h="292608">
+              <a:tr h="310896">
                 <a:tc>
                   <a:txBody>
                     <a:bodyPr/>
@@ -7875,7 +7875,7 @@
                           <a:ea typeface="Meiryo" pitchFamily="34" charset="-122"/>
                           <a:cs typeface="Meiryo" pitchFamily="34" charset="-120"/>
                         </a:rPr>
-                        <a:t>オークション成約手数料</a:t>
+                        <a:t>オークション参加</a:t>
                       </a:r>
                       <a:endParaRPr lang="en-US" sz="1100" dirty="0">
                         <a:latin typeface="Meiryo" charset="0"/>
@@ -8011,7 +8011,7 @@
                           <a:ea typeface="Meiryo" pitchFamily="34" charset="-122"/>
                           <a:cs typeface="Meiryo" pitchFamily="34" charset="-120"/>
                         </a:rPr>
-                        <a:t>0</a:t>
+                        <a:t>30</a:t>
                       </a:r>
                       <a:endParaRPr lang="en-US" sz="1100" dirty="0">
                         <a:latin typeface="Meiryo" charset="0"/>
@@ -8079,7 +8079,7 @@
                           <a:ea typeface="Meiryo" pitchFamily="34" charset="-122"/>
                           <a:cs typeface="Meiryo" pitchFamily="34" charset="-120"/>
                         </a:rPr>
-                        <a:t>0</a:t>
+                        <a:t>30</a:t>
                       </a:r>
                       <a:endParaRPr lang="en-US" sz="1100" dirty="0">
                         <a:latin typeface="Meiryo" charset="0"/>
@@ -8147,7 +8147,7 @@
                           <a:ea typeface="Meiryo" pitchFamily="34" charset="-122"/>
                           <a:cs typeface="Meiryo" pitchFamily="34" charset="-120"/>
                         </a:rPr>
-                        <a:t>◎ 最優先で誘導</a:t>
+                        <a:t>◎ 優先誘導</a:t>
                       </a:r>
                       <a:endParaRPr lang="en-US" sz="1100" dirty="0">
                         <a:latin typeface="Meiryo" charset="0"/>
@@ -8199,7 +8199,7 @@
                   </a:tcPr>
                 </a:tc>
               </a:tr>
-              <a:tr h="292608">
+              <a:tr h="310896">
                 <a:tc>
                   <a:txBody>
                     <a:bodyPr/>
@@ -8347,6 +8347,348 @@
                       <a:r>
                         <a:rPr lang="en-US" sz="1100" dirty="0">
                           <a:solidFill>
+                            <a:srgbClr val="D96A6A"/>
+                          </a:solidFill>
+                          <a:latin typeface="Meiryo" pitchFamily="34" charset="0"/>
+                          <a:ea typeface="Meiryo" pitchFamily="34" charset="-122"/>
+                          <a:cs typeface="Meiryo" pitchFamily="34" charset="-120"/>
+                        </a:rPr>
+                        <a:t>80</a:t>
+                      </a:r>
+                      <a:endParaRPr lang="en-US" sz="1100" dirty="0">
+                        <a:latin typeface="Meiryo" charset="0"/>
+                        <a:ea typeface="Meiryo" charset="0"/>
+                        <a:cs typeface="Meiryo" charset="0"/>
+                      </a:endParaRPr>
+                    </a:p>
+                  </a:txBody>
+                  <a:tcPr marL="91440" marR="91440" marT="45720" marB="45720" anchor="ctr">
+                    <a:lnL w="9525" cap="flat" cmpd="sng" algn="ctr">
+                      <a:solidFill>
+                        <a:srgbClr val="4A3038"/>
+                      </a:solidFill>
+                      <a:prstDash val="solid"/>
+                      <a:round/>
+                      <a:headEnd type="none" w="med" len="med"/>
+                      <a:tailEnd type="none" w="med" len="med"/>
+                    </a:lnL>
+                    <a:lnR w="9525" cap="flat" cmpd="sng" algn="ctr">
+                      <a:solidFill>
+                        <a:srgbClr val="4A3038"/>
+                      </a:solidFill>
+                      <a:prstDash val="solid"/>
+                      <a:round/>
+                      <a:headEnd type="none" w="med" len="med"/>
+                      <a:tailEnd type="none" w="med" len="med"/>
+                    </a:lnR>
+                    <a:lnT w="9525" cap="flat" cmpd="sng" algn="ctr">
+                      <a:solidFill>
+                        <a:srgbClr val="4A3038"/>
+                      </a:solidFill>
+                      <a:prstDash val="solid"/>
+                      <a:round/>
+                      <a:headEnd type="none" w="med" len="med"/>
+                      <a:tailEnd type="none" w="med" len="med"/>
+                    </a:lnT>
+                    <a:lnB w="9525" cap="flat" cmpd="sng" algn="ctr">
+                      <a:solidFill>
+                        <a:srgbClr val="4A3038"/>
+                      </a:solidFill>
+                      <a:prstDash val="solid"/>
+                      <a:round/>
+                      <a:headEnd type="none" w="med" len="med"/>
+                      <a:tailEnd type="none" w="med" len="med"/>
+                    </a:lnB>
+                    <a:solidFill>
+                      <a:srgbClr val="17111A"/>
+                    </a:solidFill>
+                  </a:tcPr>
+                </a:tc>
+                <a:tc>
+                  <a:txBody>
+                    <a:bodyPr/>
+                    <a:lstStyle/>
+                    <a:p>
+                      <a:pPr algn="ctr" indent="0" marL="0">
+                        <a:buNone/>
+                      </a:pPr>
+                      <a:r>
+                        <a:rPr lang="en-US" sz="1100" dirty="0">
+                          <a:solidFill>
+                            <a:srgbClr val="F2EDE6"/>
+                          </a:solidFill>
+                          <a:latin typeface="Meiryo" pitchFamily="34" charset="0"/>
+                          <a:ea typeface="Meiryo" pitchFamily="34" charset="-122"/>
+                          <a:cs typeface="Meiryo" pitchFamily="34" charset="-120"/>
+                        </a:rPr>
+                        <a:t>80</a:t>
+                      </a:r>
+                      <a:endParaRPr lang="en-US" sz="1100" dirty="0">
+                        <a:latin typeface="Meiryo" charset="0"/>
+                        <a:ea typeface="Meiryo" charset="0"/>
+                        <a:cs typeface="Meiryo" charset="0"/>
+                      </a:endParaRPr>
+                    </a:p>
+                  </a:txBody>
+                  <a:tcPr marL="91440" marR="91440" marT="45720" marB="45720" anchor="ctr">
+                    <a:lnL w="9525" cap="flat" cmpd="sng" algn="ctr">
+                      <a:solidFill>
+                        <a:srgbClr val="4A3038"/>
+                      </a:solidFill>
+                      <a:prstDash val="solid"/>
+                      <a:round/>
+                      <a:headEnd type="none" w="med" len="med"/>
+                      <a:tailEnd type="none" w="med" len="med"/>
+                    </a:lnL>
+                    <a:lnR w="9525" cap="flat" cmpd="sng" algn="ctr">
+                      <a:solidFill>
+                        <a:srgbClr val="4A3038"/>
+                      </a:solidFill>
+                      <a:prstDash val="solid"/>
+                      <a:round/>
+                      <a:headEnd type="none" w="med" len="med"/>
+                      <a:tailEnd type="none" w="med" len="med"/>
+                    </a:lnR>
+                    <a:lnT w="9525" cap="flat" cmpd="sng" algn="ctr">
+                      <a:solidFill>
+                        <a:srgbClr val="4A3038"/>
+                      </a:solidFill>
+                      <a:prstDash val="solid"/>
+                      <a:round/>
+                      <a:headEnd type="none" w="med" len="med"/>
+                      <a:tailEnd type="none" w="med" len="med"/>
+                    </a:lnT>
+                    <a:lnB w="9525" cap="flat" cmpd="sng" algn="ctr">
+                      <a:solidFill>
+                        <a:srgbClr val="4A3038"/>
+                      </a:solidFill>
+                      <a:prstDash val="solid"/>
+                      <a:round/>
+                      <a:headEnd type="none" w="med" len="med"/>
+                      <a:tailEnd type="none" w="med" len="med"/>
+                    </a:lnB>
+                    <a:solidFill>
+                      <a:srgbClr val="17111A"/>
+                    </a:solidFill>
+                  </a:tcPr>
+                </a:tc>
+                <a:tc>
+                  <a:txBody>
+                    <a:bodyPr/>
+                    <a:lstStyle/>
+                    <a:p>
+                      <a:pPr algn="ctr" indent="0" marL="0">
+                        <a:buNone/>
+                      </a:pPr>
+                      <a:r>
+                        <a:rPr lang="en-US" sz="1100" dirty="0">
+                          <a:solidFill>
+                            <a:srgbClr val="E0A458"/>
+                          </a:solidFill>
+                          <a:latin typeface="Meiryo" pitchFamily="34" charset="0"/>
+                          <a:ea typeface="Meiryo" pitchFamily="34" charset="-122"/>
+                          <a:cs typeface="Meiryo" pitchFamily="34" charset="-120"/>
+                        </a:rPr>
+                        <a:t>上限管理</a:t>
+                      </a:r>
+                      <a:endParaRPr lang="en-US" sz="1100" dirty="0">
+                        <a:latin typeface="Meiryo" charset="0"/>
+                        <a:ea typeface="Meiryo" charset="0"/>
+                        <a:cs typeface="Meiryo" charset="0"/>
+                      </a:endParaRPr>
+                    </a:p>
+                  </a:txBody>
+                  <a:tcPr marL="91440" marR="91440" marT="45720" marB="45720" anchor="ctr">
+                    <a:lnL w="9525" cap="flat" cmpd="sng" algn="ctr">
+                      <a:solidFill>
+                        <a:srgbClr val="4A3038"/>
+                      </a:solidFill>
+                      <a:prstDash val="solid"/>
+                      <a:round/>
+                      <a:headEnd type="none" w="med" len="med"/>
+                      <a:tailEnd type="none" w="med" len="med"/>
+                    </a:lnL>
+                    <a:lnR w="9525" cap="flat" cmpd="sng" algn="ctr">
+                      <a:solidFill>
+                        <a:srgbClr val="4A3038"/>
+                      </a:solidFill>
+                      <a:prstDash val="solid"/>
+                      <a:round/>
+                      <a:headEnd type="none" w="med" len="med"/>
+                      <a:tailEnd type="none" w="med" len="med"/>
+                    </a:lnR>
+                    <a:lnT w="9525" cap="flat" cmpd="sng" algn="ctr">
+                      <a:solidFill>
+                        <a:srgbClr val="4A3038"/>
+                      </a:solidFill>
+                      <a:prstDash val="solid"/>
+                      <a:round/>
+                      <a:headEnd type="none" w="med" len="med"/>
+                      <a:tailEnd type="none" w="med" len="med"/>
+                    </a:lnT>
+                    <a:lnB w="9525" cap="flat" cmpd="sng" algn="ctr">
+                      <a:solidFill>
+                        <a:srgbClr val="4A3038"/>
+                      </a:solidFill>
+                      <a:prstDash val="solid"/>
+                      <a:round/>
+                      <a:headEnd type="none" w="med" len="med"/>
+                      <a:tailEnd type="none" w="med" len="med"/>
+                    </a:lnB>
+                    <a:solidFill>
+                      <a:srgbClr val="17111A"/>
+                    </a:solidFill>
+                  </a:tcPr>
+                </a:tc>
+              </a:tr>
+              <a:tr h="310896">
+                <a:tc>
+                  <a:txBody>
+                    <a:bodyPr/>
+                    <a:lstStyle/>
+                    <a:p>
+                      <a:pPr algn="l" indent="0" marL="0">
+                        <a:buNone/>
+                      </a:pPr>
+                      <a:r>
+                        <a:rPr lang="en-US" sz="1100" dirty="0">
+                          <a:solidFill>
+                            <a:srgbClr val="F2EDE6"/>
+                          </a:solidFill>
+                          <a:latin typeface="Meiryo" pitchFamily="34" charset="0"/>
+                          <a:ea typeface="Meiryo" pitchFamily="34" charset="-122"/>
+                          <a:cs typeface="Meiryo" pitchFamily="34" charset="-120"/>
+                        </a:rPr>
+                        <a:t>会員交流イベント参加費</a:t>
+                      </a:r>
+                      <a:endParaRPr lang="en-US" sz="1100" dirty="0">
+                        <a:latin typeface="Meiryo" charset="0"/>
+                        <a:ea typeface="Meiryo" charset="0"/>
+                        <a:cs typeface="Meiryo" charset="0"/>
+                      </a:endParaRPr>
+                    </a:p>
+                  </a:txBody>
+                  <a:tcPr marL="91440" marR="91440" marT="45720" marB="45720" anchor="ctr">
+                    <a:lnL w="9525" cap="flat" cmpd="sng" algn="ctr">
+                      <a:solidFill>
+                        <a:srgbClr val="4A3038"/>
+                      </a:solidFill>
+                      <a:prstDash val="solid"/>
+                      <a:round/>
+                      <a:headEnd type="none" w="med" len="med"/>
+                      <a:tailEnd type="none" w="med" len="med"/>
+                    </a:lnL>
+                    <a:lnR w="9525" cap="flat" cmpd="sng" algn="ctr">
+                      <a:solidFill>
+                        <a:srgbClr val="4A3038"/>
+                      </a:solidFill>
+                      <a:prstDash val="solid"/>
+                      <a:round/>
+                      <a:headEnd type="none" w="med" len="med"/>
+                      <a:tailEnd type="none" w="med" len="med"/>
+                    </a:lnR>
+                    <a:lnT w="9525" cap="flat" cmpd="sng" algn="ctr">
+                      <a:solidFill>
+                        <a:srgbClr val="4A3038"/>
+                      </a:solidFill>
+                      <a:prstDash val="solid"/>
+                      <a:round/>
+                      <a:headEnd type="none" w="med" len="med"/>
+                      <a:tailEnd type="none" w="med" len="med"/>
+                    </a:lnT>
+                    <a:lnB w="9525" cap="flat" cmpd="sng" algn="ctr">
+                      <a:solidFill>
+                        <a:srgbClr val="4A3038"/>
+                      </a:solidFill>
+                      <a:prstDash val="solid"/>
+                      <a:round/>
+                      <a:headEnd type="none" w="med" len="med"/>
+                      <a:tailEnd type="none" w="med" len="med"/>
+                    </a:lnB>
+                    <a:solidFill>
+                      <a:srgbClr val="17111A"/>
+                    </a:solidFill>
+                  </a:tcPr>
+                </a:tc>
+                <a:tc>
+                  <a:txBody>
+                    <a:bodyPr/>
+                    <a:lstStyle/>
+                    <a:p>
+                      <a:pPr algn="ctr" indent="0" marL="0">
+                        <a:buNone/>
+                      </a:pPr>
+                      <a:r>
+                        <a:rPr lang="en-US" sz="1100" dirty="0">
+                          <a:solidFill>
+                            <a:srgbClr val="F2EDE6"/>
+                          </a:solidFill>
+                          <a:latin typeface="Meiryo" pitchFamily="34" charset="0"/>
+                          <a:ea typeface="Meiryo" pitchFamily="34" charset="-122"/>
+                          <a:cs typeface="Meiryo" pitchFamily="34" charset="-120"/>
+                        </a:rPr>
+                        <a:t>1.0円</a:t>
+                      </a:r>
+                      <a:endParaRPr lang="en-US" sz="1100" dirty="0">
+                        <a:latin typeface="Meiryo" charset="0"/>
+                        <a:ea typeface="Meiryo" charset="0"/>
+                        <a:cs typeface="Meiryo" charset="0"/>
+                      </a:endParaRPr>
+                    </a:p>
+                  </a:txBody>
+                  <a:tcPr marL="91440" marR="91440" marT="45720" marB="45720" anchor="ctr">
+                    <a:lnL w="9525" cap="flat" cmpd="sng" algn="ctr">
+                      <a:solidFill>
+                        <a:srgbClr val="4A3038"/>
+                      </a:solidFill>
+                      <a:prstDash val="solid"/>
+                      <a:round/>
+                      <a:headEnd type="none" w="med" len="med"/>
+                      <a:tailEnd type="none" w="med" len="med"/>
+                    </a:lnL>
+                    <a:lnR w="9525" cap="flat" cmpd="sng" algn="ctr">
+                      <a:solidFill>
+                        <a:srgbClr val="4A3038"/>
+                      </a:solidFill>
+                      <a:prstDash val="solid"/>
+                      <a:round/>
+                      <a:headEnd type="none" w="med" len="med"/>
+                      <a:tailEnd type="none" w="med" len="med"/>
+                    </a:lnR>
+                    <a:lnT w="9525" cap="flat" cmpd="sng" algn="ctr">
+                      <a:solidFill>
+                        <a:srgbClr val="4A3038"/>
+                      </a:solidFill>
+                      <a:prstDash val="solid"/>
+                      <a:round/>
+                      <a:headEnd type="none" w="med" len="med"/>
+                      <a:tailEnd type="none" w="med" len="med"/>
+                    </a:lnT>
+                    <a:lnB w="9525" cap="flat" cmpd="sng" algn="ctr">
+                      <a:solidFill>
+                        <a:srgbClr val="4A3038"/>
+                      </a:solidFill>
+                      <a:prstDash val="solid"/>
+                      <a:round/>
+                      <a:headEnd type="none" w="med" len="med"/>
+                      <a:tailEnd type="none" w="med" len="med"/>
+                    </a:lnB>
+                    <a:solidFill>
+                      <a:srgbClr val="17111A"/>
+                    </a:solidFill>
+                  </a:tcPr>
+                </a:tc>
+                <a:tc>
+                  <a:txBody>
+                    <a:bodyPr/>
+                    <a:lstStyle/>
+                    <a:p>
+                      <a:pPr algn="ctr" indent="0" marL="0">
+                        <a:buNone/>
+                      </a:pPr>
+                      <a:r>
+                        <a:rPr lang="en-US" sz="1100" dirty="0">
+                          <a:solidFill>
                             <a:srgbClr val="E0A458"/>
                           </a:solidFill>
                           <a:latin typeface="Meiryo" pitchFamily="34" charset="0"/>
@@ -8541,7 +8883,7 @@
                   </a:tcPr>
                 </a:tc>
               </a:tr>
-              <a:tr h="292608">
+              <a:tr h="310896">
                 <a:tc>
                   <a:txBody>
                     <a:bodyPr/>
@@ -8559,7 +8901,7 @@
                           <a:ea typeface="Meiryo" pitchFamily="34" charset="-122"/>
                           <a:cs typeface="Meiryo" pitchFamily="34" charset="-120"/>
                         </a:rPr>
-                        <a:t>会員交流イベント参加費</a:t>
+                        <a:t>ワイナート年間購読</a:t>
                       </a:r>
                       <a:endParaRPr lang="en-US" sz="1100" dirty="0">
                         <a:latin typeface="Meiryo" charset="0"/>
@@ -8883,7 +9225,7 @@
                   </a:tcPr>
                 </a:tc>
               </a:tr>
-              <a:tr h="292608">
+              <a:tr h="310896">
                 <a:tc>
                   <a:txBody>
                     <a:bodyPr/>
@@ -9225,690 +9567,6 @@
                   </a:tcPr>
                 </a:tc>
               </a:tr>
-              <a:tr h="292608">
-                <a:tc>
-                  <a:txBody>
-                    <a:bodyPr/>
-                    <a:lstStyle/>
-                    <a:p>
-                      <a:pPr algn="l" indent="0" marL="0">
-                        <a:buNone/>
-                      </a:pPr>
-                      <a:r>
-                        <a:rPr lang="en-US" sz="1100" dirty="0">
-                          <a:solidFill>
-                            <a:srgbClr val="F2EDE6"/>
-                          </a:solidFill>
-                          <a:latin typeface="Meiryo" pitchFamily="34" charset="0"/>
-                          <a:ea typeface="Meiryo" pitchFamily="34" charset="-122"/>
-                          <a:cs typeface="Meiryo" pitchFamily="34" charset="-120"/>
-                        </a:rPr>
-                        <a:t>系列店外の飲食</a:t>
-                      </a:r>
-                      <a:endParaRPr lang="en-US" sz="1100" dirty="0">
-                        <a:latin typeface="Meiryo" charset="0"/>
-                        <a:ea typeface="Meiryo" charset="0"/>
-                        <a:cs typeface="Meiryo" charset="0"/>
-                      </a:endParaRPr>
-                    </a:p>
-                  </a:txBody>
-                  <a:tcPr marL="91440" marR="91440" marT="45720" marB="45720" anchor="ctr">
-                    <a:lnL w="9525" cap="flat" cmpd="sng" algn="ctr">
-                      <a:solidFill>
-                        <a:srgbClr val="4A3038"/>
-                      </a:solidFill>
-                      <a:prstDash val="solid"/>
-                      <a:round/>
-                      <a:headEnd type="none" w="med" len="med"/>
-                      <a:tailEnd type="none" w="med" len="med"/>
-                    </a:lnL>
-                    <a:lnR w="9525" cap="flat" cmpd="sng" algn="ctr">
-                      <a:solidFill>
-                        <a:srgbClr val="4A3038"/>
-                      </a:solidFill>
-                      <a:prstDash val="solid"/>
-                      <a:round/>
-                      <a:headEnd type="none" w="med" len="med"/>
-                      <a:tailEnd type="none" w="med" len="med"/>
-                    </a:lnR>
-                    <a:lnT w="9525" cap="flat" cmpd="sng" algn="ctr">
-                      <a:solidFill>
-                        <a:srgbClr val="4A3038"/>
-                      </a:solidFill>
-                      <a:prstDash val="solid"/>
-                      <a:round/>
-                      <a:headEnd type="none" w="med" len="med"/>
-                      <a:tailEnd type="none" w="med" len="med"/>
-                    </a:lnT>
-                    <a:lnB w="9525" cap="flat" cmpd="sng" algn="ctr">
-                      <a:solidFill>
-                        <a:srgbClr val="4A3038"/>
-                      </a:solidFill>
-                      <a:prstDash val="solid"/>
-                      <a:round/>
-                      <a:headEnd type="none" w="med" len="med"/>
-                      <a:tailEnd type="none" w="med" len="med"/>
-                    </a:lnB>
-                    <a:solidFill>
-                      <a:srgbClr val="17111A"/>
-                    </a:solidFill>
-                  </a:tcPr>
-                </a:tc>
-                <a:tc>
-                  <a:txBody>
-                    <a:bodyPr/>
-                    <a:lstStyle/>
-                    <a:p>
-                      <a:pPr algn="ctr" indent="0" marL="0">
-                        <a:buNone/>
-                      </a:pPr>
-                      <a:r>
-                        <a:rPr lang="en-US" sz="1100" dirty="0">
-                          <a:solidFill>
-                            <a:srgbClr val="F2EDE6"/>
-                          </a:solidFill>
-                          <a:latin typeface="Meiryo" pitchFamily="34" charset="0"/>
-                          <a:ea typeface="Meiryo" pitchFamily="34" charset="-122"/>
-                          <a:cs typeface="Meiryo" pitchFamily="34" charset="-120"/>
-                        </a:rPr>
-                        <a:t>0.75円</a:t>
-                      </a:r>
-                      <a:endParaRPr lang="en-US" sz="1100" dirty="0">
-                        <a:latin typeface="Meiryo" charset="0"/>
-                        <a:ea typeface="Meiryo" charset="0"/>
-                        <a:cs typeface="Meiryo" charset="0"/>
-                      </a:endParaRPr>
-                    </a:p>
-                  </a:txBody>
-                  <a:tcPr marL="91440" marR="91440" marT="45720" marB="45720" anchor="ctr">
-                    <a:lnL w="9525" cap="flat" cmpd="sng" algn="ctr">
-                      <a:solidFill>
-                        <a:srgbClr val="4A3038"/>
-                      </a:solidFill>
-                      <a:prstDash val="solid"/>
-                      <a:round/>
-                      <a:headEnd type="none" w="med" len="med"/>
-                      <a:tailEnd type="none" w="med" len="med"/>
-                    </a:lnL>
-                    <a:lnR w="9525" cap="flat" cmpd="sng" algn="ctr">
-                      <a:solidFill>
-                        <a:srgbClr val="4A3038"/>
-                      </a:solidFill>
-                      <a:prstDash val="solid"/>
-                      <a:round/>
-                      <a:headEnd type="none" w="med" len="med"/>
-                      <a:tailEnd type="none" w="med" len="med"/>
-                    </a:lnR>
-                    <a:lnT w="9525" cap="flat" cmpd="sng" algn="ctr">
-                      <a:solidFill>
-                        <a:srgbClr val="4A3038"/>
-                      </a:solidFill>
-                      <a:prstDash val="solid"/>
-                      <a:round/>
-                      <a:headEnd type="none" w="med" len="med"/>
-                      <a:tailEnd type="none" w="med" len="med"/>
-                    </a:lnT>
-                    <a:lnB w="9525" cap="flat" cmpd="sng" algn="ctr">
-                      <a:solidFill>
-                        <a:srgbClr val="4A3038"/>
-                      </a:solidFill>
-                      <a:prstDash val="solid"/>
-                      <a:round/>
-                      <a:headEnd type="none" w="med" len="med"/>
-                      <a:tailEnd type="none" w="med" len="med"/>
-                    </a:lnB>
-                    <a:solidFill>
-                      <a:srgbClr val="17111A"/>
-                    </a:solidFill>
-                  </a:tcPr>
-                </a:tc>
-                <a:tc>
-                  <a:txBody>
-                    <a:bodyPr/>
-                    <a:lstStyle/>
-                    <a:p>
-                      <a:pPr algn="ctr" indent="0" marL="0">
-                        <a:buNone/>
-                      </a:pPr>
-                      <a:r>
-                        <a:rPr lang="en-US" sz="1100" dirty="0">
-                          <a:solidFill>
-                            <a:srgbClr val="D96A6A"/>
-                          </a:solidFill>
-                          <a:latin typeface="Meiryo" pitchFamily="34" charset="0"/>
-                          <a:ea typeface="Meiryo" pitchFamily="34" charset="-122"/>
-                          <a:cs typeface="Meiryo" pitchFamily="34" charset="-120"/>
-                        </a:rPr>
-                        <a:t>75</a:t>
-                      </a:r>
-                      <a:endParaRPr lang="en-US" sz="1100" dirty="0">
-                        <a:latin typeface="Meiryo" charset="0"/>
-                        <a:ea typeface="Meiryo" charset="0"/>
-                        <a:cs typeface="Meiryo" charset="0"/>
-                      </a:endParaRPr>
-                    </a:p>
-                  </a:txBody>
-                  <a:tcPr marL="91440" marR="91440" marT="45720" marB="45720" anchor="ctr">
-                    <a:lnL w="9525" cap="flat" cmpd="sng" algn="ctr">
-                      <a:solidFill>
-                        <a:srgbClr val="4A3038"/>
-                      </a:solidFill>
-                      <a:prstDash val="solid"/>
-                      <a:round/>
-                      <a:headEnd type="none" w="med" len="med"/>
-                      <a:tailEnd type="none" w="med" len="med"/>
-                    </a:lnL>
-                    <a:lnR w="9525" cap="flat" cmpd="sng" algn="ctr">
-                      <a:solidFill>
-                        <a:srgbClr val="4A3038"/>
-                      </a:solidFill>
-                      <a:prstDash val="solid"/>
-                      <a:round/>
-                      <a:headEnd type="none" w="med" len="med"/>
-                      <a:tailEnd type="none" w="med" len="med"/>
-                    </a:lnR>
-                    <a:lnT w="9525" cap="flat" cmpd="sng" algn="ctr">
-                      <a:solidFill>
-                        <a:srgbClr val="4A3038"/>
-                      </a:solidFill>
-                      <a:prstDash val="solid"/>
-                      <a:round/>
-                      <a:headEnd type="none" w="med" len="med"/>
-                      <a:tailEnd type="none" w="med" len="med"/>
-                    </a:lnT>
-                    <a:lnB w="9525" cap="flat" cmpd="sng" algn="ctr">
-                      <a:solidFill>
-                        <a:srgbClr val="4A3038"/>
-                      </a:solidFill>
-                      <a:prstDash val="solid"/>
-                      <a:round/>
-                      <a:headEnd type="none" w="med" len="med"/>
-                      <a:tailEnd type="none" w="med" len="med"/>
-                    </a:lnB>
-                    <a:solidFill>
-                      <a:srgbClr val="17111A"/>
-                    </a:solidFill>
-                  </a:tcPr>
-                </a:tc>
-                <a:tc>
-                  <a:txBody>
-                    <a:bodyPr/>
-                    <a:lstStyle/>
-                    <a:p>
-                      <a:pPr algn="ctr" indent="0" marL="0">
-                        <a:buNone/>
-                      </a:pPr>
-                      <a:r>
-                        <a:rPr lang="en-US" sz="1100" dirty="0">
-                          <a:solidFill>
-                            <a:srgbClr val="F2EDE6"/>
-                          </a:solidFill>
-                          <a:latin typeface="Meiryo" pitchFamily="34" charset="0"/>
-                          <a:ea typeface="Meiryo" pitchFamily="34" charset="-122"/>
-                          <a:cs typeface="Meiryo" pitchFamily="34" charset="-120"/>
-                        </a:rPr>
-                        <a:t>75</a:t>
-                      </a:r>
-                      <a:endParaRPr lang="en-US" sz="1100" dirty="0">
-                        <a:latin typeface="Meiryo" charset="0"/>
-                        <a:ea typeface="Meiryo" charset="0"/>
-                        <a:cs typeface="Meiryo" charset="0"/>
-                      </a:endParaRPr>
-                    </a:p>
-                  </a:txBody>
-                  <a:tcPr marL="91440" marR="91440" marT="45720" marB="45720" anchor="ctr">
-                    <a:lnL w="9525" cap="flat" cmpd="sng" algn="ctr">
-                      <a:solidFill>
-                        <a:srgbClr val="4A3038"/>
-                      </a:solidFill>
-                      <a:prstDash val="solid"/>
-                      <a:round/>
-                      <a:headEnd type="none" w="med" len="med"/>
-                      <a:tailEnd type="none" w="med" len="med"/>
-                    </a:lnL>
-                    <a:lnR w="9525" cap="flat" cmpd="sng" algn="ctr">
-                      <a:solidFill>
-                        <a:srgbClr val="4A3038"/>
-                      </a:solidFill>
-                      <a:prstDash val="solid"/>
-                      <a:round/>
-                      <a:headEnd type="none" w="med" len="med"/>
-                      <a:tailEnd type="none" w="med" len="med"/>
-                    </a:lnR>
-                    <a:lnT w="9525" cap="flat" cmpd="sng" algn="ctr">
-                      <a:solidFill>
-                        <a:srgbClr val="4A3038"/>
-                      </a:solidFill>
-                      <a:prstDash val="solid"/>
-                      <a:round/>
-                      <a:headEnd type="none" w="med" len="med"/>
-                      <a:tailEnd type="none" w="med" len="med"/>
-                    </a:lnT>
-                    <a:lnB w="9525" cap="flat" cmpd="sng" algn="ctr">
-                      <a:solidFill>
-                        <a:srgbClr val="4A3038"/>
-                      </a:solidFill>
-                      <a:prstDash val="solid"/>
-                      <a:round/>
-                      <a:headEnd type="none" w="med" len="med"/>
-                      <a:tailEnd type="none" w="med" len="med"/>
-                    </a:lnB>
-                    <a:solidFill>
-                      <a:srgbClr val="17111A"/>
-                    </a:solidFill>
-                  </a:tcPr>
-                </a:tc>
-                <a:tc>
-                  <a:txBody>
-                    <a:bodyPr/>
-                    <a:lstStyle/>
-                    <a:p>
-                      <a:pPr algn="ctr" indent="0" marL="0">
-                        <a:buNone/>
-                      </a:pPr>
-                      <a:r>
-                        <a:rPr lang="en-US" sz="1100" dirty="0">
-                          <a:solidFill>
-                            <a:srgbClr val="E0A458"/>
-                          </a:solidFill>
-                          <a:latin typeface="Meiryo" pitchFamily="34" charset="0"/>
-                          <a:ea typeface="Meiryo" pitchFamily="34" charset="-122"/>
-                          <a:cs typeface="Meiryo" pitchFamily="34" charset="-120"/>
-                        </a:rPr>
-                        <a:t>上限必須</a:t>
-                      </a:r>
-                      <a:endParaRPr lang="en-US" sz="1100" dirty="0">
-                        <a:latin typeface="Meiryo" charset="0"/>
-                        <a:ea typeface="Meiryo" charset="0"/>
-                        <a:cs typeface="Meiryo" charset="0"/>
-                      </a:endParaRPr>
-                    </a:p>
-                  </a:txBody>
-                  <a:tcPr marL="91440" marR="91440" marT="45720" marB="45720" anchor="ctr">
-                    <a:lnL w="9525" cap="flat" cmpd="sng" algn="ctr">
-                      <a:solidFill>
-                        <a:srgbClr val="4A3038"/>
-                      </a:solidFill>
-                      <a:prstDash val="solid"/>
-                      <a:round/>
-                      <a:headEnd type="none" w="med" len="med"/>
-                      <a:tailEnd type="none" w="med" len="med"/>
-                    </a:lnL>
-                    <a:lnR w="9525" cap="flat" cmpd="sng" algn="ctr">
-                      <a:solidFill>
-                        <a:srgbClr val="4A3038"/>
-                      </a:solidFill>
-                      <a:prstDash val="solid"/>
-                      <a:round/>
-                      <a:headEnd type="none" w="med" len="med"/>
-                      <a:tailEnd type="none" w="med" len="med"/>
-                    </a:lnR>
-                    <a:lnT w="9525" cap="flat" cmpd="sng" algn="ctr">
-                      <a:solidFill>
-                        <a:srgbClr val="4A3038"/>
-                      </a:solidFill>
-                      <a:prstDash val="solid"/>
-                      <a:round/>
-                      <a:headEnd type="none" w="med" len="med"/>
-                      <a:tailEnd type="none" w="med" len="med"/>
-                    </a:lnT>
-                    <a:lnB w="9525" cap="flat" cmpd="sng" algn="ctr">
-                      <a:solidFill>
-                        <a:srgbClr val="4A3038"/>
-                      </a:solidFill>
-                      <a:prstDash val="solid"/>
-                      <a:round/>
-                      <a:headEnd type="none" w="med" len="med"/>
-                      <a:tailEnd type="none" w="med" len="med"/>
-                    </a:lnB>
-                    <a:solidFill>
-                      <a:srgbClr val="17111A"/>
-                    </a:solidFill>
-                  </a:tcPr>
-                </a:tc>
-              </a:tr>
-              <a:tr h="292608">
-                <a:tc>
-                  <a:txBody>
-                    <a:bodyPr/>
-                    <a:lstStyle/>
-                    <a:p>
-                      <a:pPr algn="l" indent="0" marL="0">
-                        <a:buNone/>
-                      </a:pPr>
-                      <a:r>
-                        <a:rPr lang="en-US" sz="1100" dirty="0">
-                          <a:solidFill>
-                            <a:srgbClr val="F2EDE6"/>
-                          </a:solidFill>
-                          <a:latin typeface="Meiryo" pitchFamily="34" charset="0"/>
-                          <a:ea typeface="Meiryo" pitchFamily="34" charset="-122"/>
-                          <a:cs typeface="Meiryo" pitchFamily="34" charset="-120"/>
-                        </a:rPr>
-                        <a:t>失効</a:t>
-                      </a:r>
-                      <a:endParaRPr lang="en-US" sz="1100" dirty="0">
-                        <a:latin typeface="Meiryo" charset="0"/>
-                        <a:ea typeface="Meiryo" charset="0"/>
-                        <a:cs typeface="Meiryo" charset="0"/>
-                      </a:endParaRPr>
-                    </a:p>
-                  </a:txBody>
-                  <a:tcPr marL="91440" marR="91440" marT="45720" marB="45720" anchor="ctr">
-                    <a:lnL w="9525" cap="flat" cmpd="sng" algn="ctr">
-                      <a:solidFill>
-                        <a:srgbClr val="4A3038"/>
-                      </a:solidFill>
-                      <a:prstDash val="solid"/>
-                      <a:round/>
-                      <a:headEnd type="none" w="med" len="med"/>
-                      <a:tailEnd type="none" w="med" len="med"/>
-                    </a:lnL>
-                    <a:lnR w="9525" cap="flat" cmpd="sng" algn="ctr">
-                      <a:solidFill>
-                        <a:srgbClr val="4A3038"/>
-                      </a:solidFill>
-                      <a:prstDash val="solid"/>
-                      <a:round/>
-                      <a:headEnd type="none" w="med" len="med"/>
-                      <a:tailEnd type="none" w="med" len="med"/>
-                    </a:lnR>
-                    <a:lnT w="9525" cap="flat" cmpd="sng" algn="ctr">
-                      <a:solidFill>
-                        <a:srgbClr val="4A3038"/>
-                      </a:solidFill>
-                      <a:prstDash val="solid"/>
-                      <a:round/>
-                      <a:headEnd type="none" w="med" len="med"/>
-                      <a:tailEnd type="none" w="med" len="med"/>
-                    </a:lnT>
-                    <a:lnB w="9525" cap="flat" cmpd="sng" algn="ctr">
-                      <a:solidFill>
-                        <a:srgbClr val="4A3038"/>
-                      </a:solidFill>
-                      <a:prstDash val="solid"/>
-                      <a:round/>
-                      <a:headEnd type="none" w="med" len="med"/>
-                      <a:tailEnd type="none" w="med" len="med"/>
-                    </a:lnB>
-                    <a:solidFill>
-                      <a:srgbClr val="17111A"/>
-                    </a:solidFill>
-                  </a:tcPr>
-                </a:tc>
-                <a:tc>
-                  <a:txBody>
-                    <a:bodyPr/>
-                    <a:lstStyle/>
-                    <a:p>
-                      <a:pPr algn="ctr" indent="0" marL="0">
-                        <a:buNone/>
-                      </a:pPr>
-                      <a:r>
-                        <a:rPr lang="en-US" sz="1100" dirty="0">
-                          <a:solidFill>
-                            <a:srgbClr val="F2EDE6"/>
-                          </a:solidFill>
-                          <a:latin typeface="Meiryo" pitchFamily="34" charset="0"/>
-                          <a:ea typeface="Meiryo" pitchFamily="34" charset="-122"/>
-                          <a:cs typeface="Meiryo" pitchFamily="34" charset="-120"/>
-                        </a:rPr>
-                        <a:t>—</a:t>
-                      </a:r>
-                      <a:endParaRPr lang="en-US" sz="1100" dirty="0">
-                        <a:latin typeface="Meiryo" charset="0"/>
-                        <a:ea typeface="Meiryo" charset="0"/>
-                        <a:cs typeface="Meiryo" charset="0"/>
-                      </a:endParaRPr>
-                    </a:p>
-                  </a:txBody>
-                  <a:tcPr marL="91440" marR="91440" marT="45720" marB="45720" anchor="ctr">
-                    <a:lnL w="9525" cap="flat" cmpd="sng" algn="ctr">
-                      <a:solidFill>
-                        <a:srgbClr val="4A3038"/>
-                      </a:solidFill>
-                      <a:prstDash val="solid"/>
-                      <a:round/>
-                      <a:headEnd type="none" w="med" len="med"/>
-                      <a:tailEnd type="none" w="med" len="med"/>
-                    </a:lnL>
-                    <a:lnR w="9525" cap="flat" cmpd="sng" algn="ctr">
-                      <a:solidFill>
-                        <a:srgbClr val="4A3038"/>
-                      </a:solidFill>
-                      <a:prstDash val="solid"/>
-                      <a:round/>
-                      <a:headEnd type="none" w="med" len="med"/>
-                      <a:tailEnd type="none" w="med" len="med"/>
-                    </a:lnR>
-                    <a:lnT w="9525" cap="flat" cmpd="sng" algn="ctr">
-                      <a:solidFill>
-                        <a:srgbClr val="4A3038"/>
-                      </a:solidFill>
-                      <a:prstDash val="solid"/>
-                      <a:round/>
-                      <a:headEnd type="none" w="med" len="med"/>
-                      <a:tailEnd type="none" w="med" len="med"/>
-                    </a:lnT>
-                    <a:lnB w="9525" cap="flat" cmpd="sng" algn="ctr">
-                      <a:solidFill>
-                        <a:srgbClr val="4A3038"/>
-                      </a:solidFill>
-                      <a:prstDash val="solid"/>
-                      <a:round/>
-                      <a:headEnd type="none" w="med" len="med"/>
-                      <a:tailEnd type="none" w="med" len="med"/>
-                    </a:lnB>
-                    <a:solidFill>
-                      <a:srgbClr val="17111A"/>
-                    </a:solidFill>
-                  </a:tcPr>
-                </a:tc>
-                <a:tc>
-                  <a:txBody>
-                    <a:bodyPr/>
-                    <a:lstStyle/>
-                    <a:p>
-                      <a:pPr algn="ctr" indent="0" marL="0">
-                        <a:buNone/>
-                      </a:pPr>
-                      <a:r>
-                        <a:rPr lang="en-US" sz="1100" b="1" dirty="0">
-                          <a:solidFill>
-                            <a:srgbClr val="7FD1AE"/>
-                          </a:solidFill>
-                          <a:latin typeface="Meiryo" pitchFamily="34" charset="0"/>
-                          <a:ea typeface="Meiryo" pitchFamily="34" charset="-122"/>
-                          <a:cs typeface="Meiryo" pitchFamily="34" charset="-120"/>
-                        </a:rPr>
-                        <a:t>0</a:t>
-                      </a:r>
-                      <a:endParaRPr lang="en-US" sz="1100" dirty="0">
-                        <a:latin typeface="Meiryo" charset="0"/>
-                        <a:ea typeface="Meiryo" charset="0"/>
-                        <a:cs typeface="Meiryo" charset="0"/>
-                      </a:endParaRPr>
-                    </a:p>
-                  </a:txBody>
-                  <a:tcPr marL="91440" marR="91440" marT="45720" marB="45720" anchor="ctr">
-                    <a:lnL w="9525" cap="flat" cmpd="sng" algn="ctr">
-                      <a:solidFill>
-                        <a:srgbClr val="4A3038"/>
-                      </a:solidFill>
-                      <a:prstDash val="solid"/>
-                      <a:round/>
-                      <a:headEnd type="none" w="med" len="med"/>
-                      <a:tailEnd type="none" w="med" len="med"/>
-                    </a:lnL>
-                    <a:lnR w="9525" cap="flat" cmpd="sng" algn="ctr">
-                      <a:solidFill>
-                        <a:srgbClr val="4A3038"/>
-                      </a:solidFill>
-                      <a:prstDash val="solid"/>
-                      <a:round/>
-                      <a:headEnd type="none" w="med" len="med"/>
-                      <a:tailEnd type="none" w="med" len="med"/>
-                    </a:lnR>
-                    <a:lnT w="9525" cap="flat" cmpd="sng" algn="ctr">
-                      <a:solidFill>
-                        <a:srgbClr val="4A3038"/>
-                      </a:solidFill>
-                      <a:prstDash val="solid"/>
-                      <a:round/>
-                      <a:headEnd type="none" w="med" len="med"/>
-                      <a:tailEnd type="none" w="med" len="med"/>
-                    </a:lnT>
-                    <a:lnB w="9525" cap="flat" cmpd="sng" algn="ctr">
-                      <a:solidFill>
-                        <a:srgbClr val="4A3038"/>
-                      </a:solidFill>
-                      <a:prstDash val="solid"/>
-                      <a:round/>
-                      <a:headEnd type="none" w="med" len="med"/>
-                      <a:tailEnd type="none" w="med" len="med"/>
-                    </a:lnB>
-                    <a:solidFill>
-                      <a:srgbClr val="17111A"/>
-                    </a:solidFill>
-                  </a:tcPr>
-                </a:tc>
-                <a:tc>
-                  <a:txBody>
-                    <a:bodyPr/>
-                    <a:lstStyle/>
-                    <a:p>
-                      <a:pPr algn="ctr" indent="0" marL="0">
-                        <a:buNone/>
-                      </a:pPr>
-                      <a:r>
-                        <a:rPr lang="en-US" sz="1100" dirty="0">
-                          <a:solidFill>
-                            <a:srgbClr val="F2EDE6"/>
-                          </a:solidFill>
-                          <a:latin typeface="Meiryo" pitchFamily="34" charset="0"/>
-                          <a:ea typeface="Meiryo" pitchFamily="34" charset="-122"/>
-                          <a:cs typeface="Meiryo" pitchFamily="34" charset="-120"/>
-                        </a:rPr>
-                        <a:t>0</a:t>
-                      </a:r>
-                      <a:endParaRPr lang="en-US" sz="1100" dirty="0">
-                        <a:latin typeface="Meiryo" charset="0"/>
-                        <a:ea typeface="Meiryo" charset="0"/>
-                        <a:cs typeface="Meiryo" charset="0"/>
-                      </a:endParaRPr>
-                    </a:p>
-                  </a:txBody>
-                  <a:tcPr marL="91440" marR="91440" marT="45720" marB="45720" anchor="ctr">
-                    <a:lnL w="9525" cap="flat" cmpd="sng" algn="ctr">
-                      <a:solidFill>
-                        <a:srgbClr val="4A3038"/>
-                      </a:solidFill>
-                      <a:prstDash val="solid"/>
-                      <a:round/>
-                      <a:headEnd type="none" w="med" len="med"/>
-                      <a:tailEnd type="none" w="med" len="med"/>
-                    </a:lnL>
-                    <a:lnR w="9525" cap="flat" cmpd="sng" algn="ctr">
-                      <a:solidFill>
-                        <a:srgbClr val="4A3038"/>
-                      </a:solidFill>
-                      <a:prstDash val="solid"/>
-                      <a:round/>
-                      <a:headEnd type="none" w="med" len="med"/>
-                      <a:tailEnd type="none" w="med" len="med"/>
-                    </a:lnR>
-                    <a:lnT w="9525" cap="flat" cmpd="sng" algn="ctr">
-                      <a:solidFill>
-                        <a:srgbClr val="4A3038"/>
-                      </a:solidFill>
-                      <a:prstDash val="solid"/>
-                      <a:round/>
-                      <a:headEnd type="none" w="med" len="med"/>
-                      <a:tailEnd type="none" w="med" len="med"/>
-                    </a:lnT>
-                    <a:lnB w="9525" cap="flat" cmpd="sng" algn="ctr">
-                      <a:solidFill>
-                        <a:srgbClr val="4A3038"/>
-                      </a:solidFill>
-                      <a:prstDash val="solid"/>
-                      <a:round/>
-                      <a:headEnd type="none" w="med" len="med"/>
-                      <a:tailEnd type="none" w="med" len="med"/>
-                    </a:lnB>
-                    <a:solidFill>
-                      <a:srgbClr val="17111A"/>
-                    </a:solidFill>
-                  </a:tcPr>
-                </a:tc>
-                <a:tc>
-                  <a:txBody>
-                    <a:bodyPr/>
-                    <a:lstStyle/>
-                    <a:p>
-                      <a:pPr algn="ctr" indent="0" marL="0">
-                        <a:buNone/>
-                      </a:pPr>
-                      <a:r>
-                        <a:rPr lang="en-US" sz="1100" b="1" dirty="0">
-                          <a:solidFill>
-                            <a:srgbClr val="7FD1AE"/>
-                          </a:solidFill>
-                          <a:latin typeface="Meiryo" pitchFamily="34" charset="0"/>
-                          <a:ea typeface="Meiryo" pitchFamily="34" charset="-122"/>
-                          <a:cs typeface="Meiryo" pitchFamily="34" charset="-120"/>
-                        </a:rPr>
-                        <a:t>◎</a:t>
-                      </a:r>
-                      <a:endParaRPr lang="en-US" sz="1100" dirty="0">
-                        <a:latin typeface="Meiryo" charset="0"/>
-                        <a:ea typeface="Meiryo" charset="0"/>
-                        <a:cs typeface="Meiryo" charset="0"/>
-                      </a:endParaRPr>
-                    </a:p>
-                  </a:txBody>
-                  <a:tcPr marL="91440" marR="91440" marT="45720" marB="45720" anchor="ctr">
-                    <a:lnL w="9525" cap="flat" cmpd="sng" algn="ctr">
-                      <a:solidFill>
-                        <a:srgbClr val="4A3038"/>
-                      </a:solidFill>
-                      <a:prstDash val="solid"/>
-                      <a:round/>
-                      <a:headEnd type="none" w="med" len="med"/>
-                      <a:tailEnd type="none" w="med" len="med"/>
-                    </a:lnL>
-                    <a:lnR w="9525" cap="flat" cmpd="sng" algn="ctr">
-                      <a:solidFill>
-                        <a:srgbClr val="4A3038"/>
-                      </a:solidFill>
-                      <a:prstDash val="solid"/>
-                      <a:round/>
-                      <a:headEnd type="none" w="med" len="med"/>
-                      <a:tailEnd type="none" w="med" len="med"/>
-                    </a:lnR>
-                    <a:lnT w="9525" cap="flat" cmpd="sng" algn="ctr">
-                      <a:solidFill>
-                        <a:srgbClr val="4A3038"/>
-                      </a:solidFill>
-                      <a:prstDash val="solid"/>
-                      <a:round/>
-                      <a:headEnd type="none" w="med" len="med"/>
-                      <a:tailEnd type="none" w="med" len="med"/>
-                    </a:lnT>
-                    <a:lnB w="9525" cap="flat" cmpd="sng" algn="ctr">
-                      <a:solidFill>
-                        <a:srgbClr val="4A3038"/>
-                      </a:solidFill>
-                      <a:prstDash val="solid"/>
-                      <a:round/>
-                      <a:headEnd type="none" w="med" len="med"/>
-                      <a:tailEnd type="none" w="med" len="med"/>
-                    </a:lnB>
-                    <a:solidFill>
-                      <a:srgbClr val="17111A"/>
-                    </a:solidFill>
-                  </a:tcPr>
-                </a:tc>
-              </a:tr>
             </a:tbl>
           </a:graphicData>
         </a:graphic>
@@ -9921,8 +9579,8 @@
         </p:nvSpPr>
         <p:spPr>
           <a:xfrm>
-            <a:off x="566928" y="4626864"/>
-            <a:ext cx="11027664" cy="256032"/>
+            <a:off x="566928" y="4645152"/>
+            <a:ext cx="11027664" cy="219456"/>
           </a:xfrm>
           <a:prstGeom prst="rect">
             <a:avLst/>
@@ -9938,7 +9596,7 @@
               <a:buNone/>
             </a:pPr>
             <a:r>
-              <a:rPr lang="en-US" sz="1000" dirty="0">
+              <a:rPr lang="en-US" sz="950" dirty="0">
                 <a:solidFill>
                   <a:srgbClr val="C9A227"/>
                 </a:solidFill>
@@ -9946,9 +9604,9 @@
                 <a:ea typeface="Meiryo" pitchFamily="34" charset="-122"/>
                 <a:cs typeface="Meiryo" pitchFamily="34" charset="-120"/>
               </a:rPr>
-              <a:t>想定ミックス：系列店25% ／ グランメゾン18% ／ CLUB充当12% ／ オークション12% ／ スクール10% ／ イベント8% ／ 追加購入5% ／ 失効10%　→　加重平均 43.6%</a:t>
-            </a:r>
-            <a:endParaRPr lang="en-US" sz="1000" dirty="0"/>
+              <a:t>想定ミックス（利用マイル内・%）：直営27.8／グランメゾン20.0／CLUB13.3／オークション13.3／スクール10.0／イベント7.0／ワイナート3.0／追加購入5.6　→　発行ベース51.1%</a:t>
+            </a:r>
+            <a:endParaRPr lang="en-US" sz="950" dirty="0"/>
           </a:p>
         </p:txBody>
       </p:sp>
@@ -10013,13 +9671,13 @@
             <a:r>
               <a:rPr lang="en-US" sz="1600" b="1" dirty="0">
                 <a:solidFill>
-                  <a:srgbClr val="E8CE78"/>
+                  <a:srgbClr val="E0A458"/>
                 </a:solidFill>
                 <a:latin typeface="Meiryo" pitchFamily="34" charset="0"/>
                 <a:ea typeface="Meiryo" pitchFamily="34" charset="-122"/>
                 <a:cs typeface="Meiryo" pitchFamily="34" charset="-120"/>
               </a:rPr>
-              <a:t>損益分岐は 46.7%。想定は 43.6%。</a:t>
+              <a:t>損益分岐は 45.4%。想定は 51.1%。</a:t>
             </a:r>
             <a:endParaRPr lang="en-US" sz="1600" dirty="0"/>
           </a:p>
@@ -10061,7 +9719,7 @@
                 <a:ea typeface="Meiryo" pitchFamily="34" charset="-122"/>
                 <a:cs typeface="Meiryo" pitchFamily="34" charset="-120"/>
               </a:rPr>
-              <a:t>（手数料2.5% − 保管1.05% ＋ オークション0.5%）÷ 発行4.18% ＝ 46.7%。現金ベースでも3ポイントの余裕があり、成功報酬を含めればさらに厚くなります。</a:t>
+              <a:t>（手数料2.66% − 保管1.05% ＋ オークション0.5%）÷ 発行4.65% ＝ 45.4%。想定は5.7ポイント超えており、ストック現金は年▲0.27%。成功報酬1.8%を含めて+1.53%が実力です。</a:t>
             </a:r>
             <a:endParaRPr lang="en-US" sz="1000" dirty="0"/>
           </a:p>
@@ -10176,7 +9834,7 @@
                 <a:ea typeface="Meiryo" pitchFamily="34" charset="-122"/>
                 <a:cs typeface="Meiryo" pitchFamily="34" charset="-120"/>
               </a:rPr>
-              <a:t>系列店1.0円に偏るほど90%へ近づき赤字化します。原価ゼロのオークション・CLUB充当、原価50%のスクール・イベントへ誘導するほど収支は改善します。</a:t>
+              <a:t>直営飲食1.0円に偏るほど90%へ近づきます。原価10%のCLUB会費充当と30%のオークション参加へ誘導するほど収支は改善し、45.4%に届けばストック単体で黒字化します。</a:t>
             </a:r>
             <a:endParaRPr lang="en-US" sz="1000" dirty="0"/>
           </a:p>
@@ -10325,7 +9983,7 @@
                 <a:ea typeface="Meiryo" pitchFamily="34" charset="-122"/>
                 <a:cs typeface="Meiryo" pitchFamily="34" charset="-120"/>
               </a:rPr>
-              <a:t>ワイン100万円・年6%成長・成功報酬25%・仲介手数料なし。連結ベース。</a:t>
+              <a:t>ワイン100万円・年6%成長（単利）・成功報酬30%・仲介手数料なし。単体ベース。</a:t>
             </a:r>
             <a:endParaRPr lang="en-US" sz="1300" dirty="0"/>
           </a:p>
@@ -10614,7 +10272,7 @@
                           <a:ea typeface="Meiryo" pitchFamily="34" charset="-122"/>
                           <a:cs typeface="Meiryo" pitchFamily="34" charset="-120"/>
                         </a:rPr>
-                        <a:t>成功報酬25%</a:t>
+                        <a:t>成功報酬30%</a:t>
                       </a:r>
                       <a:endParaRPr lang="en-US" sz="1100" dirty="0">
                         <a:latin typeface="Meiryo" charset="0"/>
@@ -11092,7 +10750,7 @@
                           <a:ea typeface="Meiryo" pitchFamily="34" charset="-122"/>
                           <a:cs typeface="Meiryo" pitchFamily="34" charset="-120"/>
                         </a:rPr>
-                        <a:t>1,191,016</a:t>
+                        <a:t>1,180,000</a:t>
                       </a:r>
                       <a:endParaRPr lang="en-US" sz="1100" dirty="0">
                         <a:latin typeface="Meiryo" charset="0"/>
@@ -11160,7 +10818,7 @@
                           <a:ea typeface="Meiryo" pitchFamily="34" charset="-122"/>
                           <a:cs typeface="Meiryo" pitchFamily="34" charset="-120"/>
                         </a:rPr>
-                        <a:t>191,016</a:t>
+                        <a:t>180,000</a:t>
                       </a:r>
                       <a:endParaRPr lang="en-US" sz="1100" dirty="0">
                         <a:latin typeface="Meiryo" charset="0"/>
@@ -11228,7 +10886,7 @@
                           <a:ea typeface="Meiryo" pitchFamily="34" charset="-122"/>
                           <a:cs typeface="Meiryo" pitchFamily="34" charset="-120"/>
                         </a:rPr>
-                        <a:t>47,754</a:t>
+                        <a:t>54,000</a:t>
                       </a:r>
                       <a:endParaRPr lang="en-US" sz="1100" dirty="0">
                         <a:latin typeface="Meiryo" charset="0"/>
@@ -11296,7 +10954,7 @@
                           <a:ea typeface="Meiryo" pitchFamily="34" charset="-122"/>
                           <a:cs typeface="Meiryo" pitchFamily="34" charset="-120"/>
                         </a:rPr>
-                        <a:t>218,262</a:t>
+                        <a:t>163,500</a:t>
                       </a:r>
                       <a:endParaRPr lang="en-US" sz="1100" dirty="0">
                         <a:latin typeface="Meiryo" charset="0"/>
@@ -11364,7 +11022,7 @@
                           <a:ea typeface="Meiryo" pitchFamily="34" charset="-122"/>
                           <a:cs typeface="Meiryo" pitchFamily="34" charset="-120"/>
                         </a:rPr>
-                        <a:t>7.3%</a:t>
+                        <a:t>5.45%</a:t>
                       </a:r>
                       <a:endParaRPr lang="en-US" sz="1100" dirty="0">
                         <a:latin typeface="Meiryo" charset="0"/>
@@ -11432,7 +11090,7 @@
                           <a:ea typeface="Meiryo" pitchFamily="34" charset="-122"/>
                           <a:cs typeface="Meiryo" pitchFamily="34" charset="-120"/>
                         </a:rPr>
-                        <a:t>6.80%</a:t>
+                        <a:t>5.18%</a:t>
                       </a:r>
                       <a:endParaRPr lang="en-US" sz="1100" dirty="0">
                         <a:latin typeface="Meiryo" charset="0"/>
@@ -11500,7 +11158,7 @@
                           <a:ea typeface="Meiryo" pitchFamily="34" charset="-122"/>
                           <a:cs typeface="Meiryo" pitchFamily="34" charset="-120"/>
                         </a:rPr>
-                        <a:t>77,754</a:t>
+                        <a:t>58,634</a:t>
                       </a:r>
                       <a:endParaRPr lang="en-US" sz="1100" dirty="0">
                         <a:latin typeface="Meiryo" charset="0"/>
@@ -11568,7 +11226,7 @@
                           <a:ea typeface="Meiryo" pitchFamily="34" charset="-122"/>
                           <a:cs typeface="Meiryo" pitchFamily="34" charset="-120"/>
                         </a:rPr>
-                        <a:t>2.59%</a:t>
+                        <a:t>1.95%</a:t>
                       </a:r>
                       <a:endParaRPr lang="en-US" sz="1100" dirty="0">
                         <a:latin typeface="Meiryo" charset="0"/>
@@ -11706,7 +11364,7 @@
                           <a:ea typeface="Meiryo" pitchFamily="34" charset="-122"/>
                           <a:cs typeface="Meiryo" pitchFamily="34" charset="-120"/>
                         </a:rPr>
-                        <a:t>1,338,226</a:t>
+                        <a:t>1,300,000</a:t>
                       </a:r>
                       <a:endParaRPr lang="en-US" sz="1100" dirty="0">
                         <a:latin typeface="Meiryo" charset="0"/>
@@ -11774,7 +11432,7 @@
                           <a:ea typeface="Meiryo" pitchFamily="34" charset="-122"/>
                           <a:cs typeface="Meiryo" pitchFamily="34" charset="-120"/>
                         </a:rPr>
-                        <a:t>338,226</a:t>
+                        <a:t>300,000</a:t>
                       </a:r>
                       <a:endParaRPr lang="en-US" sz="1100" dirty="0">
                         <a:latin typeface="Meiryo" charset="0"/>
@@ -11842,7 +11500,7 @@
                           <a:ea typeface="Meiryo" pitchFamily="34" charset="-122"/>
                           <a:cs typeface="Meiryo" pitchFamily="34" charset="-120"/>
                         </a:rPr>
-                        <a:t>84,556</a:t>
+                        <a:t>90,000</a:t>
                       </a:r>
                       <a:endParaRPr lang="en-US" sz="1100" dirty="0">
                         <a:latin typeface="Meiryo" charset="0"/>
@@ -11910,7 +11568,7 @@
                           <a:ea typeface="Meiryo" pitchFamily="34" charset="-122"/>
                           <a:cs typeface="Meiryo" pitchFamily="34" charset="-120"/>
                         </a:rPr>
-                        <a:t>378,669</a:t>
+                        <a:t>272,500</a:t>
                       </a:r>
                       <a:endParaRPr lang="en-US" sz="1100" dirty="0">
                         <a:latin typeface="Meiryo" charset="0"/>
@@ -11978,7 +11636,7 @@
                           <a:ea typeface="Meiryo" pitchFamily="34" charset="-122"/>
                           <a:cs typeface="Meiryo" pitchFamily="34" charset="-120"/>
                         </a:rPr>
-                        <a:t>7.6%</a:t>
+                        <a:t>5.45%</a:t>
                       </a:r>
                       <a:endParaRPr lang="en-US" sz="1100" dirty="0">
                         <a:latin typeface="Meiryo" charset="0"/>
@@ -12046,7 +11704,7 @@
                           <a:ea typeface="Meiryo" pitchFamily="34" charset="-122"/>
                           <a:cs typeface="Meiryo" pitchFamily="34" charset="-120"/>
                         </a:rPr>
-                        <a:t>6.63%</a:t>
+                        <a:t>4.94%</a:t>
                       </a:r>
                       <a:endParaRPr lang="en-US" sz="1100" dirty="0">
                         <a:latin typeface="Meiryo" charset="0"/>
@@ -12114,7 +11772,7 @@
                           <a:ea typeface="Meiryo" pitchFamily="34" charset="-122"/>
                           <a:cs typeface="Meiryo" pitchFamily="34" charset="-120"/>
                         </a:rPr>
-                        <a:t>134,556</a:t>
+                        <a:t>97,724</a:t>
                       </a:r>
                       <a:endParaRPr lang="en-US" sz="1100" dirty="0">
                         <a:latin typeface="Meiryo" charset="0"/>
@@ -12182,7 +11840,7 @@
                           <a:ea typeface="Meiryo" pitchFamily="34" charset="-122"/>
                           <a:cs typeface="Meiryo" pitchFamily="34" charset="-120"/>
                         </a:rPr>
-                        <a:t>2.69%</a:t>
+                        <a:t>1.95%</a:t>
                       </a:r>
                       <a:endParaRPr lang="en-US" sz="1100" dirty="0">
                         <a:latin typeface="Meiryo" charset="0"/>
@@ -12320,7 +11978,7 @@
                           <a:ea typeface="Meiryo" pitchFamily="34" charset="-122"/>
                           <a:cs typeface="Meiryo" pitchFamily="34" charset="-120"/>
                         </a:rPr>
-                        <a:t>1,790,848</a:t>
+                        <a:t>1,600,000</a:t>
                       </a:r>
                       <a:endParaRPr lang="en-US" sz="1100" dirty="0">
                         <a:latin typeface="Meiryo" charset="0"/>
@@ -12388,7 +12046,7 @@
                           <a:ea typeface="Meiryo" pitchFamily="34" charset="-122"/>
                           <a:cs typeface="Meiryo" pitchFamily="34" charset="-120"/>
                         </a:rPr>
-                        <a:t>790,848</a:t>
+                        <a:t>600,000</a:t>
                       </a:r>
                       <a:endParaRPr lang="en-US" sz="1100" dirty="0">
                         <a:latin typeface="Meiryo" charset="0"/>
@@ -12456,7 +12114,7 @@
                           <a:ea typeface="Meiryo" pitchFamily="34" charset="-122"/>
                           <a:cs typeface="Meiryo" pitchFamily="34" charset="-120"/>
                         </a:rPr>
-                        <a:t>197,712</a:t>
+                        <a:t>180,000</a:t>
                       </a:r>
                       <a:endParaRPr lang="en-US" sz="1100" dirty="0">
                         <a:latin typeface="Meiryo" charset="0"/>
@@ -12524,7 +12182,7 @@
                           <a:ea typeface="Meiryo" pitchFamily="34" charset="-122"/>
                           <a:cs typeface="Meiryo" pitchFamily="34" charset="-120"/>
                         </a:rPr>
-                        <a:t>843,136</a:t>
+                        <a:t>545,000</a:t>
                       </a:r>
                       <a:endParaRPr lang="en-US" sz="1100" dirty="0">
                         <a:latin typeface="Meiryo" charset="0"/>
@@ -12592,7 +12250,7 @@
                           <a:ea typeface="Meiryo" pitchFamily="34" charset="-122"/>
                           <a:cs typeface="Meiryo" pitchFamily="34" charset="-120"/>
                         </a:rPr>
-                        <a:t>8.4%</a:t>
+                        <a:t>5.45%</a:t>
                       </a:r>
                       <a:endParaRPr lang="en-US" sz="1100" dirty="0">
                         <a:latin typeface="Meiryo" charset="0"/>
@@ -12660,7 +12318,7 @@
                           <a:ea typeface="Meiryo" pitchFamily="34" charset="-122"/>
                           <a:cs typeface="Meiryo" pitchFamily="34" charset="-120"/>
                         </a:rPr>
-                        <a:t>6.31%</a:t>
+                        <a:t>4.45%</a:t>
                       </a:r>
                       <a:endParaRPr lang="en-US" sz="1100" dirty="0">
                         <a:latin typeface="Meiryo" charset="0"/>
@@ -12728,7 +12386,7 @@
                           <a:ea typeface="Meiryo" pitchFamily="34" charset="-122"/>
                           <a:cs typeface="Meiryo" pitchFamily="34" charset="-120"/>
                         </a:rPr>
-                        <a:t>297,712</a:t>
+                        <a:t>195,448</a:t>
                       </a:r>
                       <a:endParaRPr lang="en-US" sz="1100" dirty="0">
                         <a:latin typeface="Meiryo" charset="0"/>
@@ -12796,7 +12454,7 @@
                           <a:ea typeface="Meiryo" pitchFamily="34" charset="-122"/>
                           <a:cs typeface="Meiryo" pitchFamily="34" charset="-120"/>
                         </a:rPr>
-                        <a:t>2.98%</a:t>
+                        <a:t>1.95%</a:t>
                       </a:r>
                       <a:endParaRPr lang="en-US" sz="1100" dirty="0">
                         <a:latin typeface="Meiryo" charset="0"/>
@@ -12860,8 +12518,8 @@
         </p:nvSpPr>
         <p:spPr>
           <a:xfrm>
-            <a:off x="566928" y="3566160"/>
-            <a:ext cx="11027664" cy="256032"/>
+            <a:off x="566928" y="3621024"/>
+            <a:ext cx="11027664" cy="219456"/>
           </a:xfrm>
           <a:prstGeom prst="rect">
             <a:avLst/>
@@ -12877,7 +12535,7 @@
               <a:buNone/>
             </a:pPr>
             <a:r>
-              <a:rPr lang="en-US" sz="1000" dirty="0">
+              <a:rPr lang="en-US" sz="950" dirty="0">
                 <a:solidFill>
                   <a:srgbClr val="A2908C"/>
                 </a:solidFill>
@@ -12885,9 +12543,9 @@
                 <a:ea typeface="Meiryo" pitchFamily="34" charset="-122"/>
                 <a:cs typeface="Meiryo" pitchFamily="34" charset="-120"/>
               </a:rPr>
-              <a:t>※会員＝（マイル額面累計 − 手数料累計）＋（値上がり益 − 成功報酬）。当社＝（手数料2.5% − マイル連結原価1.5%）×年数 ＋ 成功報酬</a:t>
-            </a:r>
-            <a:endParaRPr lang="en-US" sz="1000" dirty="0"/>
+              <a:t>※PRESTIGE（100万）の数値。会員＝（マイル額面−手数料）×年数＋（値上がり益−成功報酬）。当社＝（2.75%−1.05%＋0.5%−2.05%）×年数＋成功報酬</a:t>
+            </a:r>
+            <a:endParaRPr lang="en-US" sz="950" dirty="0"/>
           </a:p>
         </p:txBody>
       </p:sp>
@@ -13064,7 +12722,7 @@
                 <a:ea typeface="Meiryo" pitchFamily="34" charset="-122"/>
                 <a:cs typeface="Meiryo" pitchFamily="34" charset="-120"/>
               </a:rPr>
-              <a:t>年5%なら当社2.38%／年6%で2.69%／年10%で4.05%（いずれも5年）。会員と当社が完全に同じ方向を向きます。</a:t>
+              <a:t>年5%なら当社1.65%／年6%で1.95%／年10%で3.15%。会員と当社が完全に同じ方向を向きます。</a:t>
             </a:r>
             <a:endParaRPr lang="en-US" sz="1050" dirty="0"/>
           </a:p>
@@ -13243,7 +12901,7 @@
                 <a:ea typeface="Meiryo" pitchFamily="34" charset="-122"/>
                 <a:cs typeface="Meiryo" pitchFamily="34" charset="-120"/>
               </a:rPr>
-              <a:t>成功報酬25%と媒介10%の損益分岐は8.8年（6%成長時）。10%成長なら5.4年。長期保有を促す動機が当社側に働きます。</a:t>
+              <a:t>成功報酬30%と媒介10%の損益分岐は8.3年（6%成長時）。10%成長なら5.0年。長期保有を促す動機が当社側に働きます。</a:t>
             </a:r>
             <a:endParaRPr lang="en-US" sz="1050" dirty="0"/>
           </a:p>
@@ -13495,7 +13153,7 @@
                 <a:ea typeface="Meiryo" pitchFamily="34" charset="-122"/>
                 <a:cs typeface="Meiryo" pitchFamily="34" charset="-120"/>
               </a:rPr>
-              <a:t>会員は年7〜8%、当社は年2.6〜3.0%。値上がりの75%を会員に残しても、事業は成立します。</a:t>
+              <a:t>会員は年5.45%、当社は年1.95%。値上がりの70%を会員に残しても、事業は成立します。</a:t>
             </a:r>
             <a:endParaRPr lang="en-US" sz="1500" dirty="0"/>
           </a:p>
@@ -13860,7 +13518,7 @@
                           <a:ea typeface="Meiryo" pitchFamily="34" charset="-122"/>
                           <a:cs typeface="Meiryo" pitchFamily="34" charset="-120"/>
                         </a:rPr>
-                        <a:t>② 成功報酬25%（採用）</a:t>
+                        <a:t>② 成功報酬30%（採用）</a:t>
                       </a:r>
                       <a:endParaRPr lang="en-US" sz="1100" dirty="0">
                         <a:latin typeface="Meiryo" charset="0"/>
@@ -15778,7 +15436,7 @@
                           <a:ea typeface="Meiryo" pitchFamily="34" charset="-122"/>
                           <a:cs typeface="Meiryo" pitchFamily="34" charset="-120"/>
                         </a:rPr>
-                        <a:t>約2.7%</a:t>
+                        <a:t>約1.95%</a:t>
                       </a:r>
                       <a:endParaRPr lang="en-US" sz="1100" dirty="0">
                         <a:latin typeface="Meiryo" charset="0"/>
@@ -15969,7 +15627,7 @@
                 <a:ea typeface="Meiryo" pitchFamily="34" charset="-122"/>
                 <a:cs typeface="Meiryo" pitchFamily="34" charset="-120"/>
               </a:rPr>
-              <a:t>25%なら「手数料」であって「分配」ではない</a:t>
+              <a:t>30%でも「手数料」であって「分配」ではない</a:t>
             </a:r>
             <a:endParaRPr lang="en-US" sz="1400" dirty="0"/>
           </a:p>
@@ -16011,7 +15669,7 @@
                 <a:ea typeface="Meiryo" pitchFamily="34" charset="-122"/>
                 <a:cs typeface="Meiryo" pitchFamily="34" charset="-120"/>
               </a:rPr>
-              <a:t>会員が当社に払う役務の成功報酬であり、会員への利益分配ではありません。P1ファンドの成功報酬25%と同じ水準なので、既に通っている説明が使えます。</a:t>
+              <a:t>会員が当社に払う役務の成功報酬であり、会員への利益分配ではありません。P1ファンドの成功報酬25%に対し5ポイント高い水準ですが、当社が保管・保険・真正性管理まで担うことで説明できます。</a:t>
             </a:r>
             <a:endParaRPr lang="en-US" sz="1050" dirty="0"/>
           </a:p>
@@ -17461,7 +17119,7 @@
                 <a:ea typeface="Meiryo" pitchFamily="34" charset="-122"/>
                 <a:cs typeface="Meiryo" pitchFamily="34" charset="-120"/>
               </a:rPr>
-              <a:t>管理手数料に対する無償付与（簿価×3.5〜5.5%）</a:t>
+              <a:t>管理手数料に対する無償付与（簿価×4〜6%）</a:t>
             </a:r>
             <a:endParaRPr lang="en-US" sz="1100" dirty="0"/>
           </a:p>
@@ -22215,7 +21873,7 @@
                 <a:ea typeface="Meiryo" pitchFamily="34" charset="-122"/>
                 <a:cs typeface="Meiryo" pitchFamily="34" charset="-120"/>
               </a:rPr>
-              <a:t>100万・400万会員はマイル充当による単月利用のみ可。未利用時の特典をワイン購入代金へ振り替えることはできません。</a:t>
+              <a:t>100万・500万会員はマイル充当による単月利用のみ可。未利用時の特典をワイン購入代金へ振り替えることはできません。</a:t>
             </a:r>
             <a:endParaRPr lang="en-US" sz="1000" dirty="0"/>
           </a:p>
@@ -23495,7 +23153,7 @@
                 <a:ea typeface="Meiryo" pitchFamily="34" charset="-122"/>
                 <a:cs typeface="Meiryo" pitchFamily="34" charset="-120"/>
               </a:rPr>
-              <a:t>手数料はフラットに。ランク差は還元率と、届く情報に寄せる。</a:t>
+              <a:t>ランクが上がるほど、手数料は下がり還元率は上がる。差を3つの数字に集約します。</a:t>
             </a:r>
             <a:endParaRPr lang="en-US" sz="1300" dirty="0"/>
           </a:p>
@@ -23711,7 +23369,7 @@
                           <a:ea typeface="Meiryo" pitchFamily="34" charset="-122"/>
                           <a:cs typeface="Meiryo" pitchFamily="34" charset="-120"/>
                         </a:rPr>
-                        <a:t>GOLD  400万〜</a:t>
+                        <a:t>GOLD  500万〜</a:t>
                       </a:r>
                       <a:endParaRPr lang="en-US" sz="1100" dirty="0">
                         <a:latin typeface="Meiryo" charset="0"/>
@@ -23917,7 +23575,7 @@
                           <a:ea typeface="Meiryo" pitchFamily="34" charset="-122"/>
                           <a:cs typeface="Meiryo" pitchFamily="34" charset="-120"/>
                         </a:rPr>
-                        <a:t>2.5%</a:t>
+                        <a:t>2.75%</a:t>
                       </a:r>
                       <a:endParaRPr lang="en-US" sz="1100" dirty="0">
                         <a:latin typeface="Meiryo" charset="0"/>
@@ -23985,7 +23643,7 @@
                           <a:ea typeface="Meiryo" pitchFamily="34" charset="-122"/>
                           <a:cs typeface="Meiryo" pitchFamily="34" charset="-120"/>
                         </a:rPr>
-                        <a:t>2.5%</a:t>
+                        <a:t>2.60%</a:t>
                       </a:r>
                       <a:endParaRPr lang="en-US" sz="1100" dirty="0">
                         <a:latin typeface="Meiryo" charset="0"/>
@@ -24053,7 +23711,7 @@
                           <a:ea typeface="Meiryo" pitchFamily="34" charset="-122"/>
                           <a:cs typeface="Meiryo" pitchFamily="34" charset="-120"/>
                         </a:rPr>
-                        <a:t>2.5%</a:t>
+                        <a:t>2.50%</a:t>
                       </a:r>
                       <a:endParaRPr lang="en-US" sz="1100" dirty="0">
                         <a:latin typeface="Meiryo" charset="0"/>
@@ -24191,7 +23849,7 @@
                           <a:ea typeface="Meiryo" pitchFamily="34" charset="-122"/>
                           <a:cs typeface="Meiryo" pitchFamily="34" charset="-120"/>
                         </a:rPr>
-                        <a:t>3.5%</a:t>
+                        <a:t>4%</a:t>
                       </a:r>
                       <a:endParaRPr lang="en-US" sz="1100" dirty="0">
                         <a:latin typeface="Meiryo" charset="0"/>
@@ -24259,7 +23917,7 @@
                           <a:ea typeface="Meiryo" pitchFamily="34" charset="-122"/>
                           <a:cs typeface="Meiryo" pitchFamily="34" charset="-120"/>
                         </a:rPr>
-                        <a:t>4.5%</a:t>
+                        <a:t>5%</a:t>
                       </a:r>
                       <a:endParaRPr lang="en-US" sz="1100" dirty="0">
                         <a:latin typeface="Meiryo" charset="0"/>
@@ -24327,7 +23985,7 @@
                           <a:ea typeface="Meiryo" pitchFamily="34" charset="-122"/>
                           <a:cs typeface="Meiryo" pitchFamily="34" charset="-120"/>
                         </a:rPr>
-                        <a:t>5.5%</a:t>
+                        <a:t>6%</a:t>
                       </a:r>
                       <a:endParaRPr lang="en-US" sz="1100" dirty="0">
                         <a:latin typeface="Meiryo" charset="0"/>
@@ -24397,7 +24055,7 @@
                           <a:ea typeface="Meiryo" pitchFamily="34" charset="-122"/>
                           <a:cs typeface="Meiryo" pitchFamily="34" charset="-120"/>
                         </a:rPr>
-                        <a:t>実質</a:t>
+                        <a:t>実質（額面差引）</a:t>
                       </a:r>
                       <a:endParaRPr lang="en-US" sz="1100" dirty="0">
                         <a:latin typeface="Meiryo" charset="0"/>
@@ -24465,7 +24123,7 @@
                           <a:ea typeface="Meiryo" pitchFamily="34" charset="-122"/>
                           <a:cs typeface="Meiryo" pitchFamily="34" charset="-120"/>
                         </a:rPr>
-                        <a:t>+1.0%</a:t>
+                        <a:t>+1.25%</a:t>
                       </a:r>
                       <a:endParaRPr lang="en-US" sz="1100" dirty="0">
                         <a:latin typeface="Meiryo" charset="0"/>
@@ -24533,7 +24191,7 @@
                           <a:ea typeface="Meiryo" pitchFamily="34" charset="-122"/>
                           <a:cs typeface="Meiryo" pitchFamily="34" charset="-120"/>
                         </a:rPr>
-                        <a:t>+2.0%</a:t>
+                        <a:t>+2.40%</a:t>
                       </a:r>
                       <a:endParaRPr lang="en-US" sz="1100" dirty="0">
                         <a:latin typeface="Meiryo" charset="0"/>
@@ -24601,7 +24259,7 @@
                           <a:ea typeface="Meiryo" pitchFamily="34" charset="-122"/>
                           <a:cs typeface="Meiryo" pitchFamily="34" charset="-120"/>
                         </a:rPr>
-                        <a:t>+3.0%</a:t>
+                        <a:t>+3.50%</a:t>
                       </a:r>
                       <a:endParaRPr lang="en-US" sz="1100" dirty="0">
                         <a:latin typeface="Meiryo" charset="0"/>
@@ -24739,7 +24397,7 @@
                           <a:ea typeface="Meiryo" pitchFamily="34" charset="-122"/>
                           <a:cs typeface="Meiryo" pitchFamily="34" charset="-120"/>
                         </a:rPr>
-                        <a:t>25%</a:t>
+                        <a:t>30%</a:t>
                       </a:r>
                       <a:endParaRPr lang="en-US" sz="1100" dirty="0">
                         <a:latin typeface="Meiryo" charset="0"/>
@@ -24807,7 +24465,7 @@
                           <a:ea typeface="Meiryo" pitchFamily="34" charset="-122"/>
                           <a:cs typeface="Meiryo" pitchFamily="34" charset="-120"/>
                         </a:rPr>
-                        <a:t>25%</a:t>
+                        <a:t>30%</a:t>
                       </a:r>
                       <a:endParaRPr lang="en-US" sz="1100" dirty="0">
                         <a:latin typeface="Meiryo" charset="0"/>
@@ -24875,7 +24533,7 @@
                           <a:ea typeface="Meiryo" pitchFamily="34" charset="-122"/>
                           <a:cs typeface="Meiryo" pitchFamily="34" charset="-120"/>
                         </a:rPr>
-                        <a:t>25%</a:t>
+                        <a:t>30%</a:t>
                       </a:r>
                       <a:endParaRPr lang="en-US" sz="1100" dirty="0">
                         <a:latin typeface="Meiryo" charset="0"/>
@@ -25862,7 +25520,7 @@
                 <a:ea typeface="Meiryo" pitchFamily="34" charset="-122"/>
                 <a:cs typeface="Meiryo" pitchFamily="34" charset="-120"/>
               </a:rPr>
-              <a:t>9行×5ランクの特典マトリクス。営業が覚えられず、顧客も比較できません。手数料を2.75%→2.7%と刻んでも100万円あたり年500円で、体感はゼロです。</a:t>
+              <a:t>9行×5ランクの特典マトリクス。営業が覚えられず、顧客も比較できません。差は「手数料・還元率・情報」の3つに集約し、成功報酬は30%で揃えます。</a:t>
             </a:r>
             <a:endParaRPr lang="en-US" sz="1050" dirty="0"/>
           </a:p>
@@ -25977,7 +25635,7 @@
                 <a:ea typeface="Meiryo" pitchFamily="34" charset="-122"/>
                 <a:cs typeface="Meiryo" pitchFamily="34" charset="-120"/>
               </a:rPr>
-              <a:t>100万でも実質+1.0%を確保。額面0.5pp上げても当社の実費用は0.22ppしか増えないため、還元率は上げるほうが費用対効果が高い設計です。</a:t>
+              <a:t>100万でも実質+1.25%を確保。額面を0.5pp上げても当社の実費用は0.26ppしか増えません。還元率を上げるほうが費用対効果の高い設計です。</a:t>
             </a:r>
             <a:endParaRPr lang="en-US" sz="1050" dirty="0"/>
           </a:p>
@@ -29735,7 +29393,7 @@
                 <a:ea typeface="Meiryo" pitchFamily="34" charset="-122"/>
                 <a:cs typeface="Meiryo" pitchFamily="34" charset="-120"/>
               </a:rPr>
-              <a:t>契約開始時と終了時の評価額の差分 × 25%</a:t>
+              <a:t>契約開始時と終了時の評価額の差分 × 30%</a:t>
             </a:r>
             <a:endParaRPr lang="en-US" sz="1100" dirty="0"/>
           </a:p>
@@ -31264,7 +30922,7 @@
                 <a:ea typeface="Meiryo" pitchFamily="34" charset="-122"/>
                 <a:cs typeface="Meiryo" pitchFamily="34" charset="-120"/>
               </a:rPr>
-              <a:t>自社でのみ使えるマイルは『正常な商慣習に照らして値引』にあたり景品類に該当しません。実質50%値引を許容する消費者庁Q&amp;Aもあり、3.5〜5.5%は論点になりません。ただし表示は正確に。</a:t>
+              <a:t>自社でのみ使えるマイルは『正常な商慣習に照らして値引』にあたり景品類に該当しません。実質50%値引を許容する消費者庁Q&amp;Aもあり、4〜6%は論点になりません。ただし表示は正確に。</a:t>
             </a:r>
             <a:endParaRPr lang="en-US" sz="1050" dirty="0"/>
           </a:p>
@@ -37090,7 +36748,7 @@
                 <a:ea typeface="Meiryo" pitchFamily="34" charset="-122"/>
                 <a:cs typeface="Meiryo" pitchFamily="34" charset="-120"/>
               </a:rPr>
-              <a:t>WineBank単体ベース。ワイン1億円／値上がり6%・金利3%・保管料210円/本（鈴与実額）・粗利30%・管理手数料2.5%</a:t>
+              <a:t>WineBank単体ベース。ワイン1億円／値上がり6%（単利）・金利3%・保管料210円/本・粗利30%</a:t>
             </a:r>
             <a:endParaRPr lang="en-US" sz="1300" dirty="0"/>
           </a:p>
@@ -37168,7 +36826,7 @@
                 <a:ea typeface="Meiryo" pitchFamily="34" charset="-122"/>
                 <a:cs typeface="Meiryo" pitchFamily="34" charset="-120"/>
               </a:rPr>
-              <a:t>販売ミックス：100万×52名 ＋ 400万×7名 ＋ 1,000万×2名 ＝ 1億円　／　還元率 3.5/4.5/5.5%　マイル発行 418万円（原価率43.6%）　※単位：万円</a:t>
+              <a:t>販売ミックス：100万×55名 ＋ 500万×5名 ＋ 1,000万×2名 ＝ 1億円　／　管理料 2.75/2.60/2.50%　還元率 4/5/6%　マイル発行 465万円（原価率51.1%）　※単位：万円</a:t>
             </a:r>
             <a:endParaRPr lang="en-US" sz="1050" dirty="0"/>
           </a:p>
@@ -37619,7 +37277,7 @@
                           <a:ea typeface="Meiryo" pitchFamily="34" charset="-122"/>
                           <a:cs typeface="Meiryo" pitchFamily="34" charset="-120"/>
                         </a:rPr>
-                        <a:t>+2,495</a:t>
+                        <a:t>+2,455</a:t>
                       </a:r>
                       <a:endParaRPr lang="en-US" sz="1100" dirty="0">
                         <a:latin typeface="Meiryo" charset="0"/>
@@ -37687,7 +37345,7 @@
                           <a:ea typeface="Meiryo" pitchFamily="34" charset="-122"/>
                           <a:cs typeface="Meiryo" pitchFamily="34" charset="-120"/>
                         </a:rPr>
-                        <a:t>+2,900</a:t>
+                        <a:t>+2,860</a:t>
                       </a:r>
                       <a:endParaRPr lang="en-US" sz="1100" dirty="0">
                         <a:latin typeface="Meiryo" charset="0"/>
@@ -37893,7 +37551,7 @@
                           <a:ea typeface="Meiryo" pitchFamily="34" charset="-122"/>
                           <a:cs typeface="Meiryo" pitchFamily="34" charset="-120"/>
                         </a:rPr>
-                        <a:t>+9,495</a:t>
+                        <a:t>+9,455</a:t>
                       </a:r>
                       <a:endParaRPr lang="en-US" sz="1100" dirty="0">
                         <a:latin typeface="Meiryo" charset="0"/>
@@ -37961,7 +37619,7 @@
                           <a:ea typeface="Meiryo" pitchFamily="34" charset="-122"/>
                           <a:cs typeface="Meiryo" pitchFamily="34" charset="-120"/>
                         </a:rPr>
-                        <a:t>+9,900</a:t>
+                        <a:t>+9,860</a:t>
                       </a:r>
                       <a:endParaRPr lang="en-US" sz="1100" dirty="0">
                         <a:latin typeface="Meiryo" charset="0"/>
@@ -38167,7 +37825,7 @@
                           <a:ea typeface="Meiryo" pitchFamily="34" charset="-122"/>
                           <a:cs typeface="Meiryo" pitchFamily="34" charset="-120"/>
                         </a:rPr>
-                        <a:t>▲505</a:t>
+                        <a:t>▲545</a:t>
                       </a:r>
                       <a:endParaRPr lang="en-US" sz="1100" dirty="0">
                         <a:latin typeface="Meiryo" charset="0"/>
@@ -38235,7 +37893,7 @@
                           <a:ea typeface="Meiryo" pitchFamily="34" charset="-122"/>
                           <a:cs typeface="Meiryo" pitchFamily="34" charset="-120"/>
                         </a:rPr>
-                        <a:t>▲100</a:t>
+                        <a:t>▲140</a:t>
                       </a:r>
                       <a:endParaRPr lang="en-US" sz="1100" dirty="0">
                         <a:latin typeface="Meiryo" charset="0"/>
@@ -39222,7 +38880,7 @@
                 <a:ea typeface="Meiryo" pitchFamily="34" charset="-122"/>
                 <a:cs typeface="Meiryo" pitchFamily="34" charset="-120"/>
               </a:rPr>
-              <a:t>▲405万と▲505万。差は100万円です。同じだけ現金を使って、セラーのワインは1億から2億5,000万へ。しかもうち1億は、会員のお金で買われたワインです。</a:t>
+              <a:t>▲405万と▲545万。差は140万円です。同じだけ現金を使って、セラーのワインは1億から2億5,000万へ。しかもうち1億は、会員のお金で買われたワインです。</a:t>
             </a:r>
             <a:endParaRPr lang="en-US" sz="1050" dirty="0"/>
           </a:p>
@@ -39337,7 +38995,7 @@
                 <a:ea typeface="Meiryo" pitchFamily="34" charset="-122"/>
                 <a:cs typeface="Meiryo" pitchFamily="34" charset="-120"/>
               </a:rPr>
-              <a:t>自社で持つと 年▲405万（金利300＋保管105）。会員に持たせて預かると 年+13万（手数料250−保管105−マイル182＋オークション50）。成功報酬169万を含めれば +182万。同じワインで年587万ひっくり返ります。</a:t>
+              <a:t>自社で持つと 年▲405万（金利300＋保管105）。会員に持たせて預かると 年▲27万（手数料266−保管105−マイル238＋オークション50）。成功報酬180万を含めれば +153万。同じワインで年558万ひっくり返ります。</a:t>
             </a:r>
             <a:endParaRPr lang="en-US" sz="1050" dirty="0"/>
           </a:p>
@@ -39564,7 +39222,7 @@
                 <a:ea typeface="Meiryo" pitchFamily="34" charset="-122"/>
                 <a:cs typeface="Meiryo" pitchFamily="34" charset="-120"/>
               </a:rPr>
-              <a:t>毎年1億円ずつ販売を続けた場合。単体ベース、還元率3.5/4.5/5.5%、マイル原価率43.6%。　※単位：万円</a:t>
+              <a:t>毎年1億円ずつ販売を続けた場合。単体ベース、還元率4/5/6%、マイル原価率51.1%。　※単位：万円</a:t>
             </a:r>
             <a:endParaRPr lang="en-US" sz="1050" dirty="0"/>
           </a:p>
@@ -40412,7 +40070,7 @@
                           <a:ea typeface="Meiryo" pitchFamily="34" charset="-122"/>
                           <a:cs typeface="Meiryo" pitchFamily="34" charset="-120"/>
                         </a:rPr>
-                        <a:t>+145</a:t>
+                        <a:t>+161</a:t>
                       </a:r>
                       <a:endParaRPr lang="en-US" sz="1100" dirty="0">
                         <a:latin typeface="Meiryo" charset="0"/>
@@ -40480,7 +40138,7 @@
                           <a:ea typeface="Meiryo" pitchFamily="34" charset="-122"/>
                           <a:cs typeface="Meiryo" pitchFamily="34" charset="-120"/>
                         </a:rPr>
-                        <a:t>▲182</a:t>
+                        <a:t>▲238</a:t>
                       </a:r>
                       <a:endParaRPr lang="en-US" sz="1100" dirty="0">
                         <a:latin typeface="Meiryo" charset="0"/>
@@ -40616,7 +40274,7 @@
                           <a:ea typeface="Meiryo" pitchFamily="34" charset="-122"/>
                           <a:cs typeface="Meiryo" pitchFamily="34" charset="-120"/>
                         </a:rPr>
-                        <a:t>+150</a:t>
+                        <a:t>+180</a:t>
                       </a:r>
                       <a:endParaRPr lang="en-US" sz="1100" dirty="0">
                         <a:latin typeface="Meiryo" charset="0"/>
@@ -40684,7 +40342,7 @@
                           <a:ea typeface="Meiryo" pitchFamily="34" charset="-122"/>
                           <a:cs typeface="Meiryo" pitchFamily="34" charset="-120"/>
                         </a:rPr>
-                        <a:t>+3,163</a:t>
+                        <a:t>+3,153</a:t>
                       </a:r>
                       <a:endParaRPr lang="en-US" sz="1100" dirty="0">
                         <a:latin typeface="Meiryo" charset="0"/>
@@ -40958,7 +40616,7 @@
                           <a:ea typeface="Meiryo" pitchFamily="34" charset="-122"/>
                           <a:cs typeface="Meiryo" pitchFamily="34" charset="-120"/>
                         </a:rPr>
-                        <a:t>+435</a:t>
+                        <a:t>+484</a:t>
                       </a:r>
                       <a:endParaRPr lang="en-US" sz="1100" dirty="0">
                         <a:latin typeface="Meiryo" charset="0"/>
@@ -41026,7 +40684,7 @@
                           <a:ea typeface="Meiryo" pitchFamily="34" charset="-122"/>
                           <a:cs typeface="Meiryo" pitchFamily="34" charset="-120"/>
                         </a:rPr>
-                        <a:t>▲546</a:t>
+                        <a:t>▲713</a:t>
                       </a:r>
                       <a:endParaRPr lang="en-US" sz="1100" dirty="0">
                         <a:latin typeface="Meiryo" charset="0"/>
@@ -41162,7 +40820,7 @@
                           <a:ea typeface="Meiryo" pitchFamily="34" charset="-122"/>
                           <a:cs typeface="Meiryo" pitchFamily="34" charset="-120"/>
                         </a:rPr>
-                        <a:t>+450</a:t>
+                        <a:t>+540</a:t>
                       </a:r>
                       <a:endParaRPr lang="en-US" sz="1100" dirty="0">
                         <a:latin typeface="Meiryo" charset="0"/>
@@ -41230,7 +40888,7 @@
                           <a:ea typeface="Meiryo" pitchFamily="34" charset="-122"/>
                           <a:cs typeface="Meiryo" pitchFamily="34" charset="-120"/>
                         </a:rPr>
-                        <a:t>+3,489</a:t>
+                        <a:t>+3,461</a:t>
                       </a:r>
                       <a:endParaRPr lang="en-US" sz="1100" dirty="0">
                         <a:latin typeface="Meiryo" charset="0"/>
@@ -41504,7 +41162,7 @@
                           <a:ea typeface="Meiryo" pitchFamily="34" charset="-122"/>
                           <a:cs typeface="Meiryo" pitchFamily="34" charset="-120"/>
                         </a:rPr>
-                        <a:t>+725</a:t>
+                        <a:t>+806</a:t>
                       </a:r>
                       <a:endParaRPr lang="en-US" sz="1100" dirty="0">
                         <a:latin typeface="Meiryo" charset="0"/>
@@ -41572,7 +41230,7 @@
                           <a:ea typeface="Meiryo" pitchFamily="34" charset="-122"/>
                           <a:cs typeface="Meiryo" pitchFamily="34" charset="-120"/>
                         </a:rPr>
-                        <a:t>▲910</a:t>
+                        <a:t>▲1,189</a:t>
                       </a:r>
                       <a:endParaRPr lang="en-US" sz="1100" dirty="0">
                         <a:latin typeface="Meiryo" charset="0"/>
@@ -41708,7 +41366,7 @@
                           <a:ea typeface="Meiryo" pitchFamily="34" charset="-122"/>
                           <a:cs typeface="Meiryo" pitchFamily="34" charset="-120"/>
                         </a:rPr>
-                        <a:t>+750</a:t>
+                        <a:t>+900</a:t>
                       </a:r>
                       <a:endParaRPr lang="en-US" sz="1100" dirty="0">
                         <a:latin typeface="Meiryo" charset="0"/>
@@ -41776,7 +41434,7 @@
                           <a:ea typeface="Meiryo" pitchFamily="34" charset="-122"/>
                           <a:cs typeface="Meiryo" pitchFamily="34" charset="-120"/>
                         </a:rPr>
-                        <a:t>+3,815</a:t>
+                        <a:t>+3,767</a:t>
                       </a:r>
                       <a:endParaRPr lang="en-US" sz="1100" dirty="0">
                         <a:latin typeface="Meiryo" charset="0"/>
@@ -42050,7 +41708,7 @@
                           <a:ea typeface="Meiryo" pitchFamily="34" charset="-122"/>
                           <a:cs typeface="Meiryo" pitchFamily="34" charset="-120"/>
                         </a:rPr>
-                        <a:t>+1,450</a:t>
+                        <a:t>+1,613</a:t>
                       </a:r>
                       <a:endParaRPr lang="en-US" sz="1100" dirty="0">
                         <a:latin typeface="Meiryo" charset="0"/>
@@ -42118,7 +41776,7 @@
                           <a:ea typeface="Meiryo" pitchFamily="34" charset="-122"/>
                           <a:cs typeface="Meiryo" pitchFamily="34" charset="-120"/>
                         </a:rPr>
-                        <a:t>▲1,820</a:t>
+                        <a:t>▲2,378</a:t>
                       </a:r>
                       <a:endParaRPr lang="en-US" sz="1100" dirty="0">
                         <a:latin typeface="Meiryo" charset="0"/>
@@ -42254,7 +41912,7 @@
                           <a:ea typeface="Meiryo" pitchFamily="34" charset="-122"/>
                           <a:cs typeface="Meiryo" pitchFamily="34" charset="-120"/>
                         </a:rPr>
-                        <a:t>+1,500</a:t>
+                        <a:t>+1,800</a:t>
                       </a:r>
                       <a:endParaRPr lang="en-US" sz="1100" dirty="0">
                         <a:latin typeface="Meiryo" charset="0"/>
@@ -42322,7 +41980,7 @@
                           <a:ea typeface="Meiryo" pitchFamily="34" charset="-122"/>
                           <a:cs typeface="Meiryo" pitchFamily="34" charset="-120"/>
                         </a:rPr>
-                        <a:t>+4,630</a:t>
+                        <a:t>+4,535</a:t>
                       </a:r>
                       <a:endParaRPr lang="en-US" sz="1100" dirty="0">
                         <a:latin typeface="Meiryo" charset="0"/>
@@ -42487,7 +42145,7 @@
                 <a:ea typeface="Meiryo" pitchFamily="34" charset="-122"/>
                 <a:cs typeface="Meiryo" pitchFamily="34" charset="-120"/>
               </a:rPr>
-              <a:t>手数料2.5%から保管1.05%（鈴与実額210円/本）を引くと残りは1.45%。マイル1.82%はこれを超えます。差を埋めるのがオークション手数料0.5%と、値上がり益25%（年1.5%相当）です。</a:t>
+              <a:t>手数料2.66%から保管1.05%（鈴与実額210円/本）を引くと残りは1.61%。マイル2.38%はこれを超えます。差を埋めるのがオークション手数料0.5%と、値上がり益30%（年1.8%相当）です。</a:t>
             </a:r>
             <a:endParaRPr lang="en-US" sz="1050" dirty="0"/>
           </a:p>
@@ -42602,7 +42260,7 @@
                 <a:ea typeface="Meiryo" pitchFamily="34" charset="-122"/>
                 <a:cs typeface="Meiryo" pitchFamily="34" charset="-120"/>
               </a:rPr>
-              <a:t>手数料2.5%・保管1.05%・マイル1.82%・オークション0.5%・成功報酬1.5%。全部が定率なので、規模が何倍になっても差引1.63%は動きません。手出しが収入を追い越す構造ではありません。</a:t>
+              <a:t>手数料2.66%・保管1.05%・マイル2.38%・オークション0.5%・成功報酬1.8%。全部が定率なので、規模が何倍になっても差引1.53%は動きません。手出しが収入を追い越す構造ではありません。</a:t>
             </a:r>
             <a:endParaRPr lang="en-US" sz="1050" dirty="0"/>
           </a:p>
@@ -42675,7 +42333,7 @@
                 <a:ea typeface="Meiryo" pitchFamily="34" charset="-122"/>
                 <a:cs typeface="Meiryo" pitchFamily="34" charset="-120"/>
               </a:rPr>
-              <a:t>現金ベースでも年+13万。ただし成功報酬169万は出口までキャッシュになりません。資金繰りは別途見る必要があります。</a:t>
+              <a:t>現金ベースは年▲27万。成功報酬180万を含めて+153万。ただし成功報酬は出口までキャッシュになりません。</a:t>
             </a:r>
             <a:endParaRPr lang="en-US" sz="1350" dirty="0"/>
           </a:p>
@@ -46265,7 +45923,7 @@
                 <a:ea typeface="Meiryo" pitchFamily="34" charset="-122"/>
                 <a:cs typeface="Meiryo" pitchFamily="34" charset="-120"/>
               </a:rPr>
-              <a:t>成功報酬：値上がり分の25%</a:t>
+              <a:t>成功報酬：値上がり分の30%</a:t>
             </a:r>
             <a:endParaRPr lang="en-US" sz="2000" dirty="0"/>
           </a:p>
@@ -46544,7 +46202,7 @@
                 <a:ea typeface="Meiryo" pitchFamily="34" charset="-122"/>
                 <a:cs typeface="Meiryo" pitchFamily="34" charset="-120"/>
               </a:rPr>
-              <a:t>マイルは管理料に対するおまけです。値上がりの70〜75%は会員のもの。</a:t>
+              <a:t>マイルは管理料に対するおまけです。値上がりの70%は会員のもの。</a:t>
             </a:r>
             <a:endParaRPr lang="en-US" sz="1700" dirty="0"/>
           </a:p>
